--- a/decks/01-studypilot.pptx
+++ b/decks/01-studypilot.pptx
@@ -117,36 +117,36 @@
   <p:extLst>
     <p:ext uri="{521415D9-36F7-43E2-AB2F-B90AF26B5E84}">
       <p14:sectionLst xmlns:p14="http://schemas.microsoft.com/office/powerpoint/2010/main">
-        <p14:section name="Introduction" id="{ace6dd90-68d0-2924-450c-4267646563c6}">
+        <p14:section name="Introduction" id="{01d99193-7a74-b183-5399-3a0f06cdc3d5}">
           <p14:sldIdLst>
             <p14:sldId id="256"/>
           </p14:sldIdLst>
         </p14:section>
-        <p14:section name="Problem &amp; solution" id="{7285134a-f00d-d3c9-70cd-06952d9d9a3c}">
+        <p14:section name="Problem &amp; solution" id="{9cf86b61-4020-0d08-4f70-499feaa8b5d0}">
           <p14:sldIdLst>
             <p14:sldId id="257"/>
             <p14:sldId id="258"/>
           </p14:sldIdLst>
         </p14:section>
-        <p14:section name="Product" id="{bf8f82bc-20de-d4b8-4e48-7b39f6f110c7}">
+        <p14:section name="Product" id="{dd3ac2c1-d526-dd3e-f35d-815a5109ee6f}">
           <p14:sldIdLst>
             <p14:sldId id="259"/>
             <p14:sldId id="260"/>
             <p14:sldId id="261"/>
           </p14:sldIdLst>
         </p14:section>
-        <p14:section name="Why us" id="{ecee775a-82a0-00d9-b851-ce5d0580d009}">
+        <p14:section name="Why us" id="{a074c903-c020-f377-27d0-94e795ccf9d9}">
           <p14:sldIdLst>
             <p14:sldId id="262"/>
             <p14:sldId id="263"/>
           </p14:sldIdLst>
         </p14:section>
-        <p14:section name="Demo" id="{f71a06be-6ada-3c27-60de-61f487e91ab1}">
+        <p14:section name="Demo" id="{71216300-05d6-ed7a-c7b9-82d861b858c2}">
           <p14:sldIdLst>
             <p14:sldId id="264"/>
           </p14:sldIdLst>
         </p14:section>
-        <p14:section name="Roadmap" id="{2771e073-dd17-2c08-969b-da7e34c51bbd}">
+        <p14:section name="Roadmap" id="{a3170afa-ba1e-ad6e-4136-b13ff187e901}">
           <p14:sldIdLst>
             <p14:sldId id="265"/>
             <p14:sldId id="266"/>
@@ -2987,6 +2987,88 @@
               <a:t>Questions?</a:t>
             </a:r>
             <a:endParaRPr lang="en-US" sz="2600" dirty="0"/>
+          </a:p>
+        </p:txBody>
+      </p:sp>
+      <p:sp>
+        <p:nvSpPr>
+          <p:cNvPr id="6" name="QR card"/>
+          <p:cNvSpPr/>
+          <p:nvPr/>
+        </p:nvSpPr>
+        <p:spPr>
+          <a:xfrm>
+            <a:off x="9098280" y="1234440"/>
+            <a:ext cx="2514600" cy="2514600"/>
+          </a:xfrm>
+          <a:prstGeom prst="roundRect">
+            <a:avLst>
+              <a:gd name="adj" fmla="val 4364"/>
+            </a:avLst>
+          </a:prstGeom>
+          <a:solidFill>
+            <a:schemeClr val="bg1"/>
+          </a:solidFill>
+          <a:ln/>
+        </p:spPr>
+      </p:sp>
+      <p:pic>
+        <p:nvPicPr>
+          <p:cNvPr id="7" name="QR code" descr="QR code linking to the project's code">    </p:cNvPr>
+          <p:cNvPicPr>
+            <a:picLocks noChangeAspect="1"/>
+          </p:cNvPicPr>
+          <p:nvPr/>
+        </p:nvPicPr>
+        <p:blipFill>
+          <a:blip r:embed="rId1"/>
+          <a:stretch>
+            <a:fillRect/>
+          </a:stretch>
+        </p:blipFill>
+        <p:spPr>
+          <a:xfrm>
+            <a:off x="9189720" y="1325880"/>
+            <a:ext cx="2331720" cy="2331720"/>
+          </a:xfrm>
+          <a:prstGeom prst="rect">
+            <a:avLst/>
+          </a:prstGeom>
+        </p:spPr>
+      </p:pic>
+      <p:sp>
+        <p:nvSpPr>
+          <p:cNvPr id="8" name="QR caption"/>
+          <p:cNvSpPr txBox="1"/>
+          <p:nvPr/>
+        </p:nvSpPr>
+        <p:spPr>
+          <a:xfrm>
+            <a:off x="9098280" y="3767328"/>
+            <a:ext cx="2514600" cy="274320"/>
+          </a:xfrm>
+          <a:prstGeom prst="rect">
+            <a:avLst/>
+          </a:prstGeom>
+          <a:noFill/>
+          <a:ln/>
+        </p:spPr>
+        <p:txBody>
+          <a:bodyPr wrap="square" lIns="0" tIns="0" rIns="0" bIns="0" rtlCol="0" anchor="ctr"/>
+          <a:lstStyle/>
+          <a:p>
+            <a:pPr algn="ctr" indent="0" marL="0">
+              <a:buNone/>
+            </a:pPr>
+            <a:r>
+              <a:rPr lang="en-US" sz="1200" dirty="0">
+                <a:solidFill>
+                  <a:schemeClr val="accent6"/>
+                </a:solidFill>
+              </a:rPr>
+              <a:t>Scan for the code</a:t>
+            </a:r>
+            <a:endParaRPr lang="en-US" sz="1200" dirty="0"/>
           </a:p>
         </p:txBody>
       </p:sp>

--- a/decks/01-studypilot.pptx
+++ b/decks/01-studypilot.pptx
@@ -16,9 +16,10 @@
     <p:sldId id="264" r:id="rId10"/>
     <p:sldId id="265" r:id="rId11"/>
     <p:sldId id="266" r:id="rId12"/>
+    <p:sldId id="267" r:id="rId13"/>
   </p:sldIdLst>
   <p:notesMasterIdLst>
-    <p:notesMasterId r:id="rId13"/>
+    <p:notesMasterId r:id="rId14"/>
   </p:notesMasterIdLst>
   <p:sldSz cx="12192000" cy="6858000"/>
   <p:notesSz cx="6858000" cy="12192000"/>
@@ -117,39 +118,40 @@
   <p:extLst>
     <p:ext uri="{521415D9-36F7-43E2-AB2F-B90AF26B5E84}">
       <p14:sectionLst xmlns:p14="http://schemas.microsoft.com/office/powerpoint/2010/main">
-        <p14:section name="Introduction" id="{01d99193-7a74-b183-5399-3a0f06cdc3d5}">
+        <p14:section name="Introduction" id="{cb27a131-a5f1-d03c-d100-8fcd91fb6542}">
           <p14:sldIdLst>
             <p14:sldId id="256"/>
           </p14:sldIdLst>
         </p14:section>
-        <p14:section name="Problem &amp; solution" id="{9cf86b61-4020-0d08-4f70-499feaa8b5d0}">
+        <p14:section name="Problem &amp; solution" id="{0474235d-370b-ab8a-1fdf-5cde7e2be4f5}">
           <p14:sldIdLst>
             <p14:sldId id="257"/>
             <p14:sldId id="258"/>
           </p14:sldIdLst>
         </p14:section>
-        <p14:section name="Product" id="{dd3ac2c1-d526-dd3e-f35d-815a5109ee6f}">
+        <p14:section name="Product" id="{423968a6-cfd7-f5ee-00be-d8c4cba32742}">
           <p14:sldIdLst>
             <p14:sldId id="259"/>
             <p14:sldId id="260"/>
             <p14:sldId id="261"/>
           </p14:sldIdLst>
         </p14:section>
-        <p14:section name="Why us" id="{a074c903-c020-f377-27d0-94e795ccf9d9}">
+        <p14:section name="Why us" id="{1bd1c592-ec77-8c0e-169e-8d1c470fcbf3}">
           <p14:sldIdLst>
             <p14:sldId id="262"/>
             <p14:sldId id="263"/>
-          </p14:sldIdLst>
-        </p14:section>
-        <p14:section name="Demo" id="{71216300-05d6-ed7a-c7b9-82d861b858c2}">
-          <p14:sldIdLst>
             <p14:sldId id="264"/>
           </p14:sldIdLst>
         </p14:section>
-        <p14:section name="Roadmap" id="{a3170afa-ba1e-ad6e-4136-b13ff187e901}">
+        <p14:section name="Demo" id="{82b16d19-e02f-b1da-da6f-409961a2dfd6}">
           <p14:sldIdLst>
             <p14:sldId id="265"/>
+          </p14:sldIdLst>
+        </p14:section>
+        <p14:section name="Roadmap" id="{36f40654-4182-7810-76ea-07e81acdab74}">
+          <p14:sldIdLst>
             <p14:sldId id="266"/>
+            <p14:sldId id="267"/>
           </p14:sldIdLst>
         </p14:section>
       </p14:sectionLst>
@@ -644,7 +646,7 @@
           <a:p>
             <a:r>
               <a:rPr lang="en-US" dirty="0"/>
-              <a:t>Business: Free core app for every student College licence: LAN server and class readiness dashboards White-label quiz generation for ed-tech and coaching Premium packs: Tamil/Hindi support, PDF import Next: PDF and offline OCR import Tamil and Hindi tokenisers and stemmers Synonym-aware query expansion FSRS scheduler and exam-date planner Faculty mode with class-level weak-concept view</a:t>
+              <a:t>Switch to the browser now. 1. Turn Wi-Fi off and click Load demo notes 2. Summary: drag length slider, click Why? and graph nodes 3. Concepts: click a chip to see its evidence 4. Quiz: answer with a typo, check answers, see readiness rise 5. Flashcards: flip, rate Good and Again, see the SM-2 schedule 6. Ask: question with highlights and confidence, then an off-topic one</a:t>
             </a:r>
             <a:endParaRPr lang="en-US" dirty="0"/>
           </a:p>
@@ -732,7 +734,7 @@
           <a:p>
             <a:r>
               <a:rPr lang="en-US" dirty="0"/>
-              <a:t>Close with the impact line, invite questions. Keep the demo tab open in case judges want to try it.</a:t>
+              <a:t>Business: Free core app for every student College licence: LAN server and class readiness dashboards White-label quiz generation for ed-tech and coaching Premium packs: Tamil/Hindi support, PDF import Next: PDF and offline OCR import Tamil and Hindi tokenisers and stemmers Synonym-aware query expansion FSRS scheduler and exam-date planner Faculty mode with class-level weak-concept view</a:t>
             </a:r>
             <a:endParaRPr lang="en-US" dirty="0"/>
           </a:p>
@@ -756,6 +758,94 @@
             <a:fld id="{F7021451-1387-4CA6-816F-3879F97B5CBC}" type="slidenum">
               <a:rPr lang="en-US"/>
               <a:t>11</a:t>
+            </a:fld>
+            <a:endParaRPr lang="en-US"/>
+          </a:p>
+        </p:txBody>
+      </p:sp>
+    </p:spTree>
+    <p:extLst>
+      <p:ext uri="{BB962C8B-B14F-4D97-AF65-F5344CB8AC3E}">
+        <p14:creationId xmlns:p14="http://schemas.microsoft.com/office/powerpoint/2010/main" val="1024086991"/>
+      </p:ext>
+    </p:extLst>
+  </p:cSld>
+  <p:clrMapOvr>
+    <a:masterClrMapping/>
+  </p:clrMapOvr>
+</p:notes>
+</file>
+
+<file path=ppt/notesSlides/notesSlide12.xml><?xml version="1.0" encoding="utf-8"?>
+<p:notes xmlns:a="http://schemas.openxmlformats.org/drawingml/2006/main" xmlns:r="http://schemas.openxmlformats.org/officeDocument/2006/relationships" xmlns:p="http://schemas.openxmlformats.org/presentationml/2006/main">
+  <p:cSld>
+    <p:spTree>
+      <p:nvGrpSpPr>
+        <p:cNvPr id="1" name=""/>
+        <p:cNvGrpSpPr/>
+        <p:nvPr/>
+      </p:nvGrpSpPr>
+      <p:grpSpPr>
+        <a:xfrm>
+          <a:off x="0" y="0"/>
+          <a:ext cx="0" cy="0"/>
+          <a:chOff x="0" y="0"/>
+          <a:chExt cx="0" cy="0"/>
+        </a:xfrm>
+      </p:grpSpPr>
+      <p:sp>
+        <p:nvSpPr>
+          <p:cNvPr id="2" name="Slide Image Placeholder 1"/>
+          <p:cNvSpPr>
+            <a:spLocks noGrp="1" noRot="1" noChangeAspect="1"/>
+          </p:cNvSpPr>
+          <p:nvPr>
+            <p:ph type="sldImg"/>
+          </p:nvPr>
+        </p:nvSpPr>
+        <p:spPr/>
+      </p:sp>
+      <p:sp>
+        <p:nvSpPr>
+          <p:cNvPr id="3" name="Notes Placeholder 2"/>
+          <p:cNvSpPr>
+            <a:spLocks noGrp="1"/>
+          </p:cNvSpPr>
+          <p:nvPr>
+            <p:ph type="body" idx="1"/>
+          </p:nvPr>
+        </p:nvSpPr>
+        <p:spPr/>
+        <p:txBody>
+          <a:bodyPr/>
+          <a:lstStyle/>
+          <a:p>
+            <a:r>
+              <a:rPr lang="en-US" dirty="0"/>
+              <a:t>Close with the impact line, invite questions. Keep the demo tab open in case judges want to try it.</a:t>
+            </a:r>
+            <a:endParaRPr lang="en-US" dirty="0"/>
+          </a:p>
+        </p:txBody>
+      </p:sp>
+      <p:sp>
+        <p:nvSpPr>
+          <p:cNvPr id="4" name="Slide Number Placeholder 3"/>
+          <p:cNvSpPr>
+            <a:spLocks noGrp="1"/>
+          </p:cNvSpPr>
+          <p:nvPr>
+            <p:ph type="sldNum" sz="quarter" idx="10"/>
+          </p:nvPr>
+        </p:nvSpPr>
+        <p:spPr/>
+        <p:txBody>
+          <a:bodyPr/>
+          <a:lstStyle/>
+          <a:p>
+            <a:fld id="{F7021451-1387-4CA6-816F-3879F97B5CBC}" type="slidenum">
+              <a:rPr lang="en-US"/>
+              <a:t>12</a:t>
             </a:fld>
             <a:endParaRPr lang="en-US"/>
           </a:p>
@@ -1348,7 +1438,7 @@
           <a:p>
             <a:r>
               <a:rPr lang="en-US" dirty="0"/>
-              <a:t>Results: 0.526 ROUGE-1 F1 vs reference (Lead-6: 0.465); 100% QA top-3 hit rate on 31 questions (top-1 80.6%); ~6 ms full analysis of a 780-word note set; ~1 ms Ask-your-notes HTTP round trip. Impact: AI study help for students with poor connectivity No subscription, no API cost, no mobile data Notes and progress never leave the device</a:t>
+              <a:t>Compare: Re-reading notes vs Cloud AI chatbots vs StudyPilot. Works offline, notes stay local: Yes / No / Yes. Answers only from your notes: Yes / Partial / Yes (extractive). Shows why (scores, evidence): No / Partial / Yes. Auto quiz + spaced review: No / Partial / Yes (SM-2). Cost to the student: ₹0 / Free tier or paid / ₹0 / offline.</a:t>
             </a:r>
             <a:endParaRPr lang="en-US" dirty="0"/>
           </a:p>
@@ -1436,7 +1526,7 @@
           <a:p>
             <a:r>
               <a:rPr lang="en-US" dirty="0"/>
-              <a:t>Switch to the browser now. 1. Turn Wi-Fi off and click Load demo notes 2. Summary: drag length slider, click Why? and graph nodes 3. Concepts: click a chip to see its evidence 4. Quiz: answer with a typo, check answers, see readiness rise 5. Flashcards: flip, rate Good and Again, see the SM-2 schedule 6. Ask: question with highlights and confidence, then an off-topic one</a:t>
+              <a:t>Results: 0.526 ROUGE-1 F1 vs reference (Lead-6: 0.465); 100% QA top-3 hit rate on 31 questions (top-1 80.6%); ~6 ms full analysis of a 780-word note set; ~1 ms Ask-your-notes HTTP round trip. Impact: AI study help for students with poor connectivity No subscription, no API cost, no mobile data Notes and progress never leave the device</a:t>
             </a:r>
             <a:endParaRPr lang="en-US" dirty="0"/>
           </a:p>
@@ -2309,7 +2399,7 @@
                   <a:schemeClr val="tx1"/>
                 </a:solidFill>
               </a:rPr>
-              <a:t>Feasibility, business model &amp; roadmap</a:t>
+              <a:t>Live demo in 3 minutes</a:t>
             </a:r>
             <a:endParaRPr lang="en-US" sz="3600" dirty="0"/>
           </a:p>
@@ -2317,36 +2407,14 @@
       </p:sp>
       <p:sp>
         <p:nvSpPr>
-          <p:cNvPr id="3" name="Business model card"/>
+          <p:cNvPr id="3" name="Step 1 dot"/>
           <p:cNvSpPr/>
           <p:nvPr/>
         </p:nvSpPr>
         <p:spPr>
           <a:xfrm>
-            <a:off x="548640" y="1371600"/>
-            <a:ext cx="5410048" cy="4297680"/>
-          </a:xfrm>
-          <a:prstGeom prst="roundRect">
-            <a:avLst>
-              <a:gd name="adj" fmla="val 2553"/>
-            </a:avLst>
-          </a:prstGeom>
-          <a:solidFill>
-            <a:schemeClr val="bg2"/>
-          </a:solidFill>
-          <a:ln/>
-        </p:spPr>
-      </p:sp>
-      <p:sp>
-        <p:nvSpPr>
-          <p:cNvPr id="4" name="Business model circle"/>
-          <p:cNvSpPr/>
-          <p:nvPr/>
-        </p:nvSpPr>
-        <p:spPr>
-          <a:xfrm>
-            <a:off x="868680" y="1645920"/>
-            <a:ext cx="548640" cy="548640"/>
+            <a:off x="548640" y="1472184"/>
+            <a:ext cx="457200" cy="457200"/>
           </a:xfrm>
           <a:prstGeom prst="ellipse">
             <a:avLst/>
@@ -2357,9 +2425,575 @@
           <a:ln/>
         </p:spPr>
       </p:sp>
+      <p:sp>
+        <p:nvSpPr>
+          <p:cNvPr id="4" name="Step 1 number"/>
+          <p:cNvSpPr txBox="1"/>
+          <p:nvPr/>
+        </p:nvSpPr>
+        <p:spPr>
+          <a:xfrm>
+            <a:off x="548640" y="1472184"/>
+            <a:ext cx="457200" cy="457200"/>
+          </a:xfrm>
+          <a:prstGeom prst="rect">
+            <a:avLst/>
+          </a:prstGeom>
+          <a:noFill/>
+          <a:ln/>
+        </p:spPr>
+        <p:txBody>
+          <a:bodyPr wrap="square" lIns="0" tIns="0" rIns="0" bIns="0" rtlCol="0" anchor="ctr"/>
+          <a:lstStyle/>
+          <a:p>
+            <a:pPr algn="ctr" indent="0" marL="0">
+              <a:buNone/>
+            </a:pPr>
+            <a:r>
+              <a:rPr lang="en-US" sz="1600" b="1" dirty="0">
+                <a:solidFill>
+                  <a:schemeClr val="bg1"/>
+                </a:solidFill>
+              </a:rPr>
+              <a:t>1</a:t>
+            </a:r>
+            <a:endParaRPr lang="en-US" sz="1600" dirty="0"/>
+          </a:p>
+        </p:txBody>
+      </p:sp>
+      <p:sp>
+        <p:nvSpPr>
+          <p:cNvPr id="5" name="Step 1 text"/>
+          <p:cNvSpPr txBox="1"/>
+          <p:nvPr/>
+        </p:nvSpPr>
+        <p:spPr>
+          <a:xfrm>
+            <a:off x="1234440" y="1371600"/>
+            <a:ext cx="5120640" cy="658368"/>
+          </a:xfrm>
+          <a:prstGeom prst="rect">
+            <a:avLst/>
+          </a:prstGeom>
+          <a:noFill/>
+          <a:ln/>
+        </p:spPr>
+        <p:txBody>
+          <a:bodyPr wrap="square" lIns="0" tIns="0" rIns="0" bIns="0" rtlCol="0" anchor="ctr"/>
+          <a:lstStyle/>
+          <a:p>
+            <a:pPr indent="0" marL="0">
+              <a:buNone/>
+            </a:pPr>
+            <a:r>
+              <a:rPr lang="en-US" sz="1600" dirty="0">
+                <a:solidFill>
+                  <a:schemeClr val="tx1"/>
+                </a:solidFill>
+              </a:rPr>
+              <a:t>Turn Wi-Fi off and click Load demo notes</a:t>
+            </a:r>
+            <a:endParaRPr lang="en-US" sz="1600" dirty="0"/>
+          </a:p>
+        </p:txBody>
+      </p:sp>
+      <p:sp>
+        <p:nvSpPr>
+          <p:cNvPr id="6" name="Step 2 dot"/>
+          <p:cNvSpPr/>
+          <p:nvPr/>
+        </p:nvSpPr>
+        <p:spPr>
+          <a:xfrm>
+            <a:off x="548640" y="2240280"/>
+            <a:ext cx="457200" cy="457200"/>
+          </a:xfrm>
+          <a:prstGeom prst="ellipse">
+            <a:avLst/>
+          </a:prstGeom>
+          <a:solidFill>
+            <a:schemeClr val="accent1"/>
+          </a:solidFill>
+          <a:ln/>
+        </p:spPr>
+      </p:sp>
+      <p:sp>
+        <p:nvSpPr>
+          <p:cNvPr id="7" name="Step 2 number"/>
+          <p:cNvSpPr txBox="1"/>
+          <p:nvPr/>
+        </p:nvSpPr>
+        <p:spPr>
+          <a:xfrm>
+            <a:off x="548640" y="2240280"/>
+            <a:ext cx="457200" cy="457200"/>
+          </a:xfrm>
+          <a:prstGeom prst="rect">
+            <a:avLst/>
+          </a:prstGeom>
+          <a:noFill/>
+          <a:ln/>
+        </p:spPr>
+        <p:txBody>
+          <a:bodyPr wrap="square" lIns="0" tIns="0" rIns="0" bIns="0" rtlCol="0" anchor="ctr"/>
+          <a:lstStyle/>
+          <a:p>
+            <a:pPr algn="ctr" indent="0" marL="0">
+              <a:buNone/>
+            </a:pPr>
+            <a:r>
+              <a:rPr lang="en-US" sz="1600" b="1" dirty="0">
+                <a:solidFill>
+                  <a:schemeClr val="bg1"/>
+                </a:solidFill>
+              </a:rPr>
+              <a:t>2</a:t>
+            </a:r>
+            <a:endParaRPr lang="en-US" sz="1600" dirty="0"/>
+          </a:p>
+        </p:txBody>
+      </p:sp>
+      <p:sp>
+        <p:nvSpPr>
+          <p:cNvPr id="8" name="Step 2 text"/>
+          <p:cNvSpPr txBox="1"/>
+          <p:nvPr/>
+        </p:nvSpPr>
+        <p:spPr>
+          <a:xfrm>
+            <a:off x="1234440" y="2139696"/>
+            <a:ext cx="5120640" cy="658368"/>
+          </a:xfrm>
+          <a:prstGeom prst="rect">
+            <a:avLst/>
+          </a:prstGeom>
+          <a:noFill/>
+          <a:ln/>
+        </p:spPr>
+        <p:txBody>
+          <a:bodyPr wrap="square" lIns="0" tIns="0" rIns="0" bIns="0" rtlCol="0" anchor="ctr"/>
+          <a:lstStyle/>
+          <a:p>
+            <a:pPr indent="0" marL="0">
+              <a:buNone/>
+            </a:pPr>
+            <a:r>
+              <a:rPr lang="en-US" sz="1600" dirty="0">
+                <a:solidFill>
+                  <a:schemeClr val="tx1"/>
+                </a:solidFill>
+              </a:rPr>
+              <a:t>Summary: drag length slider, click Why? and graph nodes</a:t>
+            </a:r>
+            <a:endParaRPr lang="en-US" sz="1600" dirty="0"/>
+          </a:p>
+        </p:txBody>
+      </p:sp>
+      <p:sp>
+        <p:nvSpPr>
+          <p:cNvPr id="9" name="Step 3 dot"/>
+          <p:cNvSpPr/>
+          <p:nvPr/>
+        </p:nvSpPr>
+        <p:spPr>
+          <a:xfrm>
+            <a:off x="548640" y="3008376"/>
+            <a:ext cx="457200" cy="457200"/>
+          </a:xfrm>
+          <a:prstGeom prst="ellipse">
+            <a:avLst/>
+          </a:prstGeom>
+          <a:solidFill>
+            <a:schemeClr val="accent1"/>
+          </a:solidFill>
+          <a:ln/>
+        </p:spPr>
+      </p:sp>
+      <p:sp>
+        <p:nvSpPr>
+          <p:cNvPr id="10" name="Step 3 number"/>
+          <p:cNvSpPr txBox="1"/>
+          <p:nvPr/>
+        </p:nvSpPr>
+        <p:spPr>
+          <a:xfrm>
+            <a:off x="548640" y="3008376"/>
+            <a:ext cx="457200" cy="457200"/>
+          </a:xfrm>
+          <a:prstGeom prst="rect">
+            <a:avLst/>
+          </a:prstGeom>
+          <a:noFill/>
+          <a:ln/>
+        </p:spPr>
+        <p:txBody>
+          <a:bodyPr wrap="square" lIns="0" tIns="0" rIns="0" bIns="0" rtlCol="0" anchor="ctr"/>
+          <a:lstStyle/>
+          <a:p>
+            <a:pPr algn="ctr" indent="0" marL="0">
+              <a:buNone/>
+            </a:pPr>
+            <a:r>
+              <a:rPr lang="en-US" sz="1600" b="1" dirty="0">
+                <a:solidFill>
+                  <a:schemeClr val="bg1"/>
+                </a:solidFill>
+              </a:rPr>
+              <a:t>3</a:t>
+            </a:r>
+            <a:endParaRPr lang="en-US" sz="1600" dirty="0"/>
+          </a:p>
+        </p:txBody>
+      </p:sp>
+      <p:sp>
+        <p:nvSpPr>
+          <p:cNvPr id="11" name="Step 3 text"/>
+          <p:cNvSpPr txBox="1"/>
+          <p:nvPr/>
+        </p:nvSpPr>
+        <p:spPr>
+          <a:xfrm>
+            <a:off x="1234440" y="2907792"/>
+            <a:ext cx="5120640" cy="658368"/>
+          </a:xfrm>
+          <a:prstGeom prst="rect">
+            <a:avLst/>
+          </a:prstGeom>
+          <a:noFill/>
+          <a:ln/>
+        </p:spPr>
+        <p:txBody>
+          <a:bodyPr wrap="square" lIns="0" tIns="0" rIns="0" bIns="0" rtlCol="0" anchor="ctr"/>
+          <a:lstStyle/>
+          <a:p>
+            <a:pPr indent="0" marL="0">
+              <a:buNone/>
+            </a:pPr>
+            <a:r>
+              <a:rPr lang="en-US" sz="1600" dirty="0">
+                <a:solidFill>
+                  <a:schemeClr val="tx1"/>
+                </a:solidFill>
+              </a:rPr>
+              <a:t>Concepts: click a chip to see its evidence</a:t>
+            </a:r>
+            <a:endParaRPr lang="en-US" sz="1600" dirty="0"/>
+          </a:p>
+        </p:txBody>
+      </p:sp>
+      <p:sp>
+        <p:nvSpPr>
+          <p:cNvPr id="12" name="Step 4 dot"/>
+          <p:cNvSpPr/>
+          <p:nvPr/>
+        </p:nvSpPr>
+        <p:spPr>
+          <a:xfrm>
+            <a:off x="548640" y="3776472"/>
+            <a:ext cx="457200" cy="457200"/>
+          </a:xfrm>
+          <a:prstGeom prst="ellipse">
+            <a:avLst/>
+          </a:prstGeom>
+          <a:solidFill>
+            <a:schemeClr val="accent1"/>
+          </a:solidFill>
+          <a:ln/>
+        </p:spPr>
+      </p:sp>
+      <p:sp>
+        <p:nvSpPr>
+          <p:cNvPr id="13" name="Step 4 number"/>
+          <p:cNvSpPr txBox="1"/>
+          <p:nvPr/>
+        </p:nvSpPr>
+        <p:spPr>
+          <a:xfrm>
+            <a:off x="548640" y="3776472"/>
+            <a:ext cx="457200" cy="457200"/>
+          </a:xfrm>
+          <a:prstGeom prst="rect">
+            <a:avLst/>
+          </a:prstGeom>
+          <a:noFill/>
+          <a:ln/>
+        </p:spPr>
+        <p:txBody>
+          <a:bodyPr wrap="square" lIns="0" tIns="0" rIns="0" bIns="0" rtlCol="0" anchor="ctr"/>
+          <a:lstStyle/>
+          <a:p>
+            <a:pPr algn="ctr" indent="0" marL="0">
+              <a:buNone/>
+            </a:pPr>
+            <a:r>
+              <a:rPr lang="en-US" sz="1600" b="1" dirty="0">
+                <a:solidFill>
+                  <a:schemeClr val="bg1"/>
+                </a:solidFill>
+              </a:rPr>
+              <a:t>4</a:t>
+            </a:r>
+            <a:endParaRPr lang="en-US" sz="1600" dirty="0"/>
+          </a:p>
+        </p:txBody>
+      </p:sp>
+      <p:sp>
+        <p:nvSpPr>
+          <p:cNvPr id="14" name="Step 4 text"/>
+          <p:cNvSpPr txBox="1"/>
+          <p:nvPr/>
+        </p:nvSpPr>
+        <p:spPr>
+          <a:xfrm>
+            <a:off x="1234440" y="3675888"/>
+            <a:ext cx="5120640" cy="658368"/>
+          </a:xfrm>
+          <a:prstGeom prst="rect">
+            <a:avLst/>
+          </a:prstGeom>
+          <a:noFill/>
+          <a:ln/>
+        </p:spPr>
+        <p:txBody>
+          <a:bodyPr wrap="square" lIns="0" tIns="0" rIns="0" bIns="0" rtlCol="0" anchor="ctr"/>
+          <a:lstStyle/>
+          <a:p>
+            <a:pPr indent="0" marL="0">
+              <a:buNone/>
+            </a:pPr>
+            <a:r>
+              <a:rPr lang="en-US" sz="1600" dirty="0">
+                <a:solidFill>
+                  <a:schemeClr val="tx1"/>
+                </a:solidFill>
+              </a:rPr>
+              <a:t>Quiz: answer with a typo, check answers, see readiness rise</a:t>
+            </a:r>
+            <a:endParaRPr lang="en-US" sz="1600" dirty="0"/>
+          </a:p>
+        </p:txBody>
+      </p:sp>
+      <p:sp>
+        <p:nvSpPr>
+          <p:cNvPr id="15" name="Step 5 dot"/>
+          <p:cNvSpPr/>
+          <p:nvPr/>
+        </p:nvSpPr>
+        <p:spPr>
+          <a:xfrm>
+            <a:off x="548640" y="4544568"/>
+            <a:ext cx="457200" cy="457200"/>
+          </a:xfrm>
+          <a:prstGeom prst="ellipse">
+            <a:avLst/>
+          </a:prstGeom>
+          <a:solidFill>
+            <a:schemeClr val="accent1"/>
+          </a:solidFill>
+          <a:ln/>
+        </p:spPr>
+      </p:sp>
+      <p:sp>
+        <p:nvSpPr>
+          <p:cNvPr id="16" name="Step 5 number"/>
+          <p:cNvSpPr txBox="1"/>
+          <p:nvPr/>
+        </p:nvSpPr>
+        <p:spPr>
+          <a:xfrm>
+            <a:off x="548640" y="4544568"/>
+            <a:ext cx="457200" cy="457200"/>
+          </a:xfrm>
+          <a:prstGeom prst="rect">
+            <a:avLst/>
+          </a:prstGeom>
+          <a:noFill/>
+          <a:ln/>
+        </p:spPr>
+        <p:txBody>
+          <a:bodyPr wrap="square" lIns="0" tIns="0" rIns="0" bIns="0" rtlCol="0" anchor="ctr"/>
+          <a:lstStyle/>
+          <a:p>
+            <a:pPr algn="ctr" indent="0" marL="0">
+              <a:buNone/>
+            </a:pPr>
+            <a:r>
+              <a:rPr lang="en-US" sz="1600" b="1" dirty="0">
+                <a:solidFill>
+                  <a:schemeClr val="bg1"/>
+                </a:solidFill>
+              </a:rPr>
+              <a:t>5</a:t>
+            </a:r>
+            <a:endParaRPr lang="en-US" sz="1600" dirty="0"/>
+          </a:p>
+        </p:txBody>
+      </p:sp>
+      <p:sp>
+        <p:nvSpPr>
+          <p:cNvPr id="17" name="Step 5 text"/>
+          <p:cNvSpPr txBox="1"/>
+          <p:nvPr/>
+        </p:nvSpPr>
+        <p:spPr>
+          <a:xfrm>
+            <a:off x="1234440" y="4443984"/>
+            <a:ext cx="5120640" cy="658368"/>
+          </a:xfrm>
+          <a:prstGeom prst="rect">
+            <a:avLst/>
+          </a:prstGeom>
+          <a:noFill/>
+          <a:ln/>
+        </p:spPr>
+        <p:txBody>
+          <a:bodyPr wrap="square" lIns="0" tIns="0" rIns="0" bIns="0" rtlCol="0" anchor="ctr"/>
+          <a:lstStyle/>
+          <a:p>
+            <a:pPr indent="0" marL="0">
+              <a:buNone/>
+            </a:pPr>
+            <a:r>
+              <a:rPr lang="en-US" sz="1600" dirty="0">
+                <a:solidFill>
+                  <a:schemeClr val="tx1"/>
+                </a:solidFill>
+              </a:rPr>
+              <a:t>Flashcards: flip, rate Good and Again, see the SM-2 schedule</a:t>
+            </a:r>
+            <a:endParaRPr lang="en-US" sz="1600" dirty="0"/>
+          </a:p>
+        </p:txBody>
+      </p:sp>
+      <p:sp>
+        <p:nvSpPr>
+          <p:cNvPr id="18" name="Step 6 dot"/>
+          <p:cNvSpPr/>
+          <p:nvPr/>
+        </p:nvSpPr>
+        <p:spPr>
+          <a:xfrm>
+            <a:off x="548640" y="5312664"/>
+            <a:ext cx="457200" cy="457200"/>
+          </a:xfrm>
+          <a:prstGeom prst="ellipse">
+            <a:avLst/>
+          </a:prstGeom>
+          <a:solidFill>
+            <a:schemeClr val="accent1"/>
+          </a:solidFill>
+          <a:ln/>
+        </p:spPr>
+      </p:sp>
+      <p:sp>
+        <p:nvSpPr>
+          <p:cNvPr id="19" name="Step 6 number"/>
+          <p:cNvSpPr txBox="1"/>
+          <p:nvPr/>
+        </p:nvSpPr>
+        <p:spPr>
+          <a:xfrm>
+            <a:off x="548640" y="5312664"/>
+            <a:ext cx="457200" cy="457200"/>
+          </a:xfrm>
+          <a:prstGeom prst="rect">
+            <a:avLst/>
+          </a:prstGeom>
+          <a:noFill/>
+          <a:ln/>
+        </p:spPr>
+        <p:txBody>
+          <a:bodyPr wrap="square" lIns="0" tIns="0" rIns="0" bIns="0" rtlCol="0" anchor="ctr"/>
+          <a:lstStyle/>
+          <a:p>
+            <a:pPr algn="ctr" indent="0" marL="0">
+              <a:buNone/>
+            </a:pPr>
+            <a:r>
+              <a:rPr lang="en-US" sz="1600" b="1" dirty="0">
+                <a:solidFill>
+                  <a:schemeClr val="bg1"/>
+                </a:solidFill>
+              </a:rPr>
+              <a:t>6</a:t>
+            </a:r>
+            <a:endParaRPr lang="en-US" sz="1600" dirty="0"/>
+          </a:p>
+        </p:txBody>
+      </p:sp>
+      <p:sp>
+        <p:nvSpPr>
+          <p:cNvPr id="20" name="Step 6 text"/>
+          <p:cNvSpPr txBox="1"/>
+          <p:nvPr/>
+        </p:nvSpPr>
+        <p:spPr>
+          <a:xfrm>
+            <a:off x="1234440" y="5212080"/>
+            <a:ext cx="5120640" cy="658368"/>
+          </a:xfrm>
+          <a:prstGeom prst="rect">
+            <a:avLst/>
+          </a:prstGeom>
+          <a:noFill/>
+          <a:ln/>
+        </p:spPr>
+        <p:txBody>
+          <a:bodyPr wrap="square" lIns="0" tIns="0" rIns="0" bIns="0" rtlCol="0" anchor="ctr"/>
+          <a:lstStyle/>
+          <a:p>
+            <a:pPr indent="0" marL="0">
+              <a:buNone/>
+            </a:pPr>
+            <a:r>
+              <a:rPr lang="en-US" sz="1600" dirty="0">
+                <a:solidFill>
+                  <a:schemeClr val="tx1"/>
+                </a:solidFill>
+              </a:rPr>
+              <a:t>Ask: question with highlights and confidence, then an off-topic one</a:t>
+            </a:r>
+            <a:endParaRPr lang="en-US" sz="1600" dirty="0"/>
+          </a:p>
+        </p:txBody>
+      </p:sp>
+      <p:sp>
+        <p:nvSpPr>
+          <p:cNvPr id="21" name="Demo screenshot frame"/>
+          <p:cNvSpPr/>
+          <p:nvPr/>
+        </p:nvSpPr>
+        <p:spPr>
+          <a:xfrm>
+            <a:off x="6528816" y="1545336"/>
+            <a:ext cx="5138928" cy="3252978"/>
+          </a:xfrm>
+          <a:prstGeom prst="roundRect">
+            <a:avLst>
+              <a:gd name="adj" fmla="val 2249"/>
+            </a:avLst>
+          </a:prstGeom>
+          <a:solidFill>
+            <a:schemeClr val="bg1"/>
+          </a:solidFill>
+          <a:ln w="12700">
+            <a:solidFill>
+              <a:schemeClr val="bg2"/>
+            </a:solidFill>
+            <a:prstDash val="solid"/>
+          </a:ln>
+          <a:effectLst>
+            <a:outerShdw sx="100000" sy="100000" kx="0" ky="0" algn="bl" rotWithShape="0" blurRad="101600" dist="25400" dir="5400000">
+              <a:srgbClr val="000000">
+                <a:alpha val="14000"/>
+              </a:srgbClr>
+            </a:outerShdw>
+          </a:effectLst>
+        </p:spPr>
+      </p:sp>
       <p:pic>
         <p:nvPicPr>
-          <p:cNvPr id="5" name="Business model icon" descr="preencoded.png">    </p:cNvPr>
+          <p:cNvPr id="22" name="Demo screenshot" descr="StudyPilot screenshot: Quiz">    </p:cNvPr>
           <p:cNvPicPr>
             <a:picLocks noChangeAspect="1"/>
           </p:cNvPicPr>
@@ -2373,8 +3007,8 @@
         </p:blipFill>
         <p:spPr>
           <a:xfrm>
-            <a:off x="1005840" y="1783080"/>
-            <a:ext cx="274320" cy="274320"/>
+            <a:off x="6583680" y="1600200"/>
+            <a:ext cx="5029200" cy="3143250"/>
           </a:xfrm>
           <a:prstGeom prst="rect">
             <a:avLst/>
@@ -2383,14 +3017,14 @@
       </p:pic>
       <p:sp>
         <p:nvSpPr>
-          <p:cNvPr id="6" name="Business model title"/>
+          <p:cNvPr id="23" name="Demo screenshot caption"/>
           <p:cNvSpPr txBox="1"/>
           <p:nvPr/>
         </p:nvSpPr>
         <p:spPr>
           <a:xfrm>
-            <a:off x="1600200" y="1645920"/>
-            <a:ext cx="4038448" cy="548640"/>
+            <a:off x="6583680" y="4880610"/>
+            <a:ext cx="5029200" cy="274320"/>
           </a:xfrm>
           <a:prstGeom prst="rect">
             <a:avLst/>
@@ -2402,31 +3036,42 @@
           <a:bodyPr wrap="square" lIns="0" tIns="0" rIns="0" bIns="0" rtlCol="0" anchor="ctr"/>
           <a:lstStyle/>
           <a:p>
-            <a:pPr indent="0" marL="0">
-              <a:buNone/>
-            </a:pPr>
-            <a:r>
-              <a:rPr lang="en-US" sz="2000" b="1" dirty="0">
-                <a:solidFill>
-                  <a:schemeClr val="tx1"/>
-                </a:solidFill>
-              </a:rPr>
-              <a:t>Business model</a:t>
-            </a:r>
-            <a:endParaRPr lang="en-US" sz="2000" dirty="0"/>
-          </a:p>
-        </p:txBody>
-      </p:sp>
-      <p:sp>
-        <p:nvSpPr>
-          <p:cNvPr id="7" name="Business model list"/>
+            <a:pPr algn="ctr" indent="0" marL="0">
+              <a:buNone/>
+            </a:pPr>
+            <a:r>
+              <a:rPr lang="en-US" sz="1200" dirty="0">
+                <a:solidFill>
+                  <a:schemeClr val="accent1"/>
+                </a:solidFill>
+              </a:rPr>
+              <a:t>▸ </a:t>
+            </a:r>
+            <a:pPr algn="ctr" indent="0" marL="0">
+              <a:buNone/>
+            </a:pPr>
+            <a:r>
+              <a:rPr lang="en-US" sz="1200" dirty="0">
+                <a:solidFill>
+                  <a:schemeClr val="accent4"/>
+                </a:solidFill>
+              </a:rPr>
+              <a:t>Quiz</a:t>
+            </a:r>
+            <a:endParaRPr lang="en-US" sz="1200" dirty="0"/>
+          </a:p>
+        </p:txBody>
+      </p:sp>
+      <p:sp>
+        <p:nvSpPr>
+          <p:cNvPr id="24" name="Run command"/>
           <p:cNvSpPr txBox="1"/>
           <p:nvPr/>
         </p:nvSpPr>
         <p:spPr>
           <a:xfrm>
-            <a:off x="914400" y="2468880"/>
-            <a:ext cx="4678528" cy="3017520"/>
+            <a:off x="6583680" y="5246370"/>
+            <a:ext cx="5029200" cy="411480"/>
           </a:xfrm>
           <a:prstGeom prst="rect">
             <a:avLst/>
@@ -2435,293 +3080,24 @@
           <a:ln/>
         </p:spPr>
         <p:txBody>
-          <a:bodyPr wrap="square" lIns="0" tIns="0" rIns="0" bIns="0" rtlCol="0" anchor="t"/>
-          <a:lstStyle/>
-          <a:p>
-            <a:pPr marL="228600" indent="-228600">
-              <a:spcAft>
-                <a:spcPts val="1000"/>
-              </a:spcAft>
-              <a:buSzPct val="100000"/>
-              <a:buChar char="•"/>
-            </a:pPr>
-            <a:r>
-              <a:rPr lang="en-US" sz="1600" dirty="0">
-                <a:solidFill>
-                  <a:schemeClr val="tx1"/>
-                </a:solidFill>
-              </a:rPr>
-              <a:t>Free core app for every student</a:t>
-            </a:r>
-            <a:endParaRPr lang="en-US" sz="1600" dirty="0"/>
-          </a:p>
-          <a:p>
-            <a:pPr marL="228600" indent="-228600">
-              <a:spcAft>
-                <a:spcPts val="1000"/>
-              </a:spcAft>
-              <a:buSzPct val="100000"/>
-              <a:buChar char="•"/>
-            </a:pPr>
-            <a:r>
-              <a:rPr lang="en-US" sz="1600" dirty="0">
-                <a:solidFill>
-                  <a:schemeClr val="tx1"/>
-                </a:solidFill>
-              </a:rPr>
-              <a:t>College licence: LAN server and class readiness dashboards</a:t>
-            </a:r>
-            <a:endParaRPr lang="en-US" sz="1600" dirty="0"/>
-          </a:p>
-          <a:p>
-            <a:pPr marL="228600" indent="-228600">
-              <a:spcAft>
-                <a:spcPts val="1000"/>
-              </a:spcAft>
-              <a:buSzPct val="100000"/>
-              <a:buChar char="•"/>
-            </a:pPr>
-            <a:r>
-              <a:rPr lang="en-US" sz="1600" dirty="0">
-                <a:solidFill>
-                  <a:schemeClr val="tx1"/>
-                </a:solidFill>
-              </a:rPr>
-              <a:t>White-label quiz generation for ed-tech and coaching</a:t>
-            </a:r>
-            <a:endParaRPr lang="en-US" sz="1600" dirty="0"/>
-          </a:p>
-          <a:p>
-            <a:pPr marL="228600" indent="-228600">
-              <a:spcAft>
-                <a:spcPts val="1000"/>
-              </a:spcAft>
-              <a:buSzPct val="100000"/>
-              <a:buChar char="•"/>
-            </a:pPr>
-            <a:r>
-              <a:rPr lang="en-US" sz="1600" dirty="0">
-                <a:solidFill>
-                  <a:schemeClr val="tx1"/>
-                </a:solidFill>
-              </a:rPr>
-              <a:t>Premium packs: Tamil/Hindi support, PDF import</a:t>
-            </a:r>
-            <a:endParaRPr lang="en-US" sz="1600" dirty="0"/>
-          </a:p>
-        </p:txBody>
-      </p:sp>
-      <p:sp>
-        <p:nvSpPr>
-          <p:cNvPr id="8" name="Future scope card"/>
-          <p:cNvSpPr/>
-          <p:nvPr/>
-        </p:nvSpPr>
-        <p:spPr>
-          <a:xfrm>
-            <a:off x="6233008" y="1371600"/>
-            <a:ext cx="5410048" cy="4297680"/>
-          </a:xfrm>
-          <a:prstGeom prst="roundRect">
-            <a:avLst>
-              <a:gd name="adj" fmla="val 2553"/>
-            </a:avLst>
-          </a:prstGeom>
-          <a:solidFill>
-            <a:schemeClr val="accent2"/>
-          </a:solidFill>
-          <a:ln/>
-        </p:spPr>
-      </p:sp>
-      <p:sp>
-        <p:nvSpPr>
-          <p:cNvPr id="9" name="Future scope circle"/>
-          <p:cNvSpPr/>
-          <p:nvPr/>
-        </p:nvSpPr>
-        <p:spPr>
-          <a:xfrm>
-            <a:off x="6553048" y="1645920"/>
-            <a:ext cx="548640" cy="548640"/>
-          </a:xfrm>
-          <a:prstGeom prst="ellipse">
-            <a:avLst/>
-          </a:prstGeom>
-          <a:solidFill>
-            <a:schemeClr val="accent1"/>
-          </a:solidFill>
-          <a:ln/>
-        </p:spPr>
-      </p:sp>
-      <p:pic>
-        <p:nvPicPr>
-          <p:cNvPr id="10" name="Future scope icon" descr="preencoded.png">    </p:cNvPr>
-          <p:cNvPicPr>
-            <a:picLocks noChangeAspect="1"/>
-          </p:cNvPicPr>
-          <p:nvPr/>
-        </p:nvPicPr>
-        <p:blipFill>
-          <a:blip r:embed="rId2"/>
-          <a:stretch>
-            <a:fillRect/>
-          </a:stretch>
-        </p:blipFill>
-        <p:spPr>
-          <a:xfrm>
-            <a:off x="6690208" y="1783080"/>
-            <a:ext cx="274320" cy="274320"/>
-          </a:xfrm>
-          <a:prstGeom prst="rect">
-            <a:avLst/>
-          </a:prstGeom>
-        </p:spPr>
-      </p:pic>
-      <p:sp>
-        <p:nvSpPr>
-          <p:cNvPr id="11" name="Future scope title"/>
-          <p:cNvSpPr txBox="1"/>
-          <p:nvPr/>
-        </p:nvSpPr>
-        <p:spPr>
-          <a:xfrm>
-            <a:off x="7284568" y="1645920"/>
-            <a:ext cx="4038448" cy="548640"/>
-          </a:xfrm>
-          <a:prstGeom prst="rect">
-            <a:avLst/>
-          </a:prstGeom>
-          <a:noFill/>
-          <a:ln/>
-        </p:spPr>
-        <p:txBody>
           <a:bodyPr wrap="square" lIns="0" tIns="0" rIns="0" bIns="0" rtlCol="0" anchor="ctr"/>
           <a:lstStyle/>
           <a:p>
-            <a:pPr indent="0" marL="0">
-              <a:buNone/>
-            </a:pPr>
-            <a:r>
-              <a:rPr lang="en-US" sz="2000" b="1" dirty="0">
-                <a:solidFill>
-                  <a:schemeClr val="tx1"/>
-                </a:solidFill>
-              </a:rPr>
-              <a:t>Future scope</a:t>
-            </a:r>
-            <a:endParaRPr lang="en-US" sz="2000" dirty="0"/>
-          </a:p>
-        </p:txBody>
-      </p:sp>
-      <p:sp>
-        <p:nvSpPr>
-          <p:cNvPr id="12" name="Future scope list"/>
-          <p:cNvSpPr txBox="1"/>
-          <p:nvPr/>
-        </p:nvSpPr>
-        <p:spPr>
-          <a:xfrm>
-            <a:off x="6598768" y="2468880"/>
-            <a:ext cx="4678528" cy="3017520"/>
-          </a:xfrm>
-          <a:prstGeom prst="rect">
-            <a:avLst/>
-          </a:prstGeom>
-          <a:noFill/>
-          <a:ln/>
-        </p:spPr>
-        <p:txBody>
-          <a:bodyPr wrap="square" lIns="0" tIns="0" rIns="0" bIns="0" rtlCol="0" anchor="t"/>
-          <a:lstStyle/>
-          <a:p>
-            <a:pPr marL="228600" indent="-228600">
-              <a:spcAft>
-                <a:spcPts val="1000"/>
-              </a:spcAft>
-              <a:buSzPct val="100000"/>
-              <a:buChar char="•"/>
-            </a:pPr>
-            <a:r>
-              <a:rPr lang="en-US" sz="1600" dirty="0">
-                <a:solidFill>
-                  <a:schemeClr val="tx1"/>
-                </a:solidFill>
-              </a:rPr>
-              <a:t>PDF and offline OCR import</a:t>
-            </a:r>
-            <a:endParaRPr lang="en-US" sz="1600" dirty="0"/>
-          </a:p>
-          <a:p>
-            <a:pPr marL="228600" indent="-228600">
-              <a:spcAft>
-                <a:spcPts val="1000"/>
-              </a:spcAft>
-              <a:buSzPct val="100000"/>
-              <a:buChar char="•"/>
-            </a:pPr>
-            <a:r>
-              <a:rPr lang="en-US" sz="1600" dirty="0">
-                <a:solidFill>
-                  <a:schemeClr val="tx1"/>
-                </a:solidFill>
-              </a:rPr>
-              <a:t>Tamil and Hindi tokenisers and stemmers</a:t>
-            </a:r>
-            <a:endParaRPr lang="en-US" sz="1600" dirty="0"/>
-          </a:p>
-          <a:p>
-            <a:pPr marL="228600" indent="-228600">
-              <a:spcAft>
-                <a:spcPts val="1000"/>
-              </a:spcAft>
-              <a:buSzPct val="100000"/>
-              <a:buChar char="•"/>
-            </a:pPr>
-            <a:r>
-              <a:rPr lang="en-US" sz="1600" dirty="0">
-                <a:solidFill>
-                  <a:schemeClr val="tx1"/>
-                </a:solidFill>
-              </a:rPr>
-              <a:t>Synonym-aware query expansion</a:t>
-            </a:r>
-            <a:endParaRPr lang="en-US" sz="1600" dirty="0"/>
-          </a:p>
-          <a:p>
-            <a:pPr marL="228600" indent="-228600">
-              <a:spcAft>
-                <a:spcPts val="1000"/>
-              </a:spcAft>
-              <a:buSzPct val="100000"/>
-              <a:buChar char="•"/>
-            </a:pPr>
-            <a:r>
-              <a:rPr lang="en-US" sz="1600" dirty="0">
-                <a:solidFill>
-                  <a:schemeClr val="tx1"/>
-                </a:solidFill>
-              </a:rPr>
-              <a:t>FSRS scheduler and exam-date planner</a:t>
-            </a:r>
-            <a:endParaRPr lang="en-US" sz="1600" dirty="0"/>
-          </a:p>
-          <a:p>
-            <a:pPr marL="228600" indent="-228600">
-              <a:spcAft>
-                <a:spcPts val="1000"/>
-              </a:spcAft>
-              <a:buSzPct val="100000"/>
-              <a:buChar char="•"/>
-            </a:pPr>
-            <a:r>
-              <a:rPr lang="en-US" sz="1600" dirty="0">
-                <a:solidFill>
-                  <a:schemeClr val="tx1"/>
-                </a:solidFill>
-              </a:rPr>
-              <a:t>Faculty mode with class-level weak-concept view</a:t>
-            </a:r>
-            <a:endParaRPr lang="en-US" sz="1600" dirty="0"/>
+            <a:pPr algn="ctr" indent="0" marL="0">
+              <a:buNone/>
+            </a:pPr>
+            <a:r>
+              <a:rPr lang="en-US" sz="1400" dirty="0">
+                <a:solidFill>
+                  <a:schemeClr val="accent3"/>
+                </a:solidFill>
+                <a:latin typeface="Courier New" pitchFamily="34" charset="0"/>
+                <a:ea typeface="Courier New" pitchFamily="34" charset="-122"/>
+                <a:cs typeface="Courier New" pitchFamily="34" charset="-120"/>
+              </a:rPr>
+              <a:t>python app.py  →  http://localhost:8001</a:t>
+            </a:r>
+            <a:endParaRPr lang="en-US" sz="1400" dirty="0"/>
           </a:p>
         </p:txBody>
       </p:sp>
@@ -2797,6 +3173,524 @@
       </p:grpSpPr>
       <p:sp>
         <p:nvSpPr>
+          <p:cNvPr id="2" name="Text 0"/>
+          <p:cNvSpPr/>
+          <p:nvPr>
+            <p:ph idx="100" type="title" hasCustomPrompt="1"/>
+          </p:nvPr>
+        </p:nvSpPr>
+        <p:spPr>
+          <a:xfrm>
+            <a:off x="548640" y="320040"/>
+            <a:ext cx="11094415" cy="777240"/>
+          </a:xfrm>
+          <a:prstGeom prst="rect">
+            <a:avLst/>
+          </a:prstGeom>
+          <a:noFill/>
+          <a:ln/>
+        </p:spPr>
+        <p:txBody>
+          <a:bodyPr wrap="square" lIns="0" tIns="0" rIns="0" bIns="0" rtlCol="0" anchor="ctr"/>
+          <a:lstStyle/>
+          <a:p>
+            <a:pPr algn="l" indent="0" marL="0">
+              <a:buNone/>
+            </a:pPr>
+            <a:r>
+              <a:rPr lang="en-US" sz="3600" b="1" dirty="0">
+                <a:solidFill>
+                  <a:schemeClr val="tx1"/>
+                </a:solidFill>
+              </a:rPr>
+              <a:t>Feasibility, business model &amp; roadmap</a:t>
+            </a:r>
+            <a:endParaRPr lang="en-US" sz="3600" dirty="0"/>
+          </a:p>
+        </p:txBody>
+      </p:sp>
+      <p:sp>
+        <p:nvSpPr>
+          <p:cNvPr id="3" name="Business model card"/>
+          <p:cNvSpPr/>
+          <p:nvPr/>
+        </p:nvSpPr>
+        <p:spPr>
+          <a:xfrm>
+            <a:off x="548640" y="1371600"/>
+            <a:ext cx="5410048" cy="4297680"/>
+          </a:xfrm>
+          <a:prstGeom prst="roundRect">
+            <a:avLst>
+              <a:gd name="adj" fmla="val 2553"/>
+            </a:avLst>
+          </a:prstGeom>
+          <a:solidFill>
+            <a:schemeClr val="bg2"/>
+          </a:solidFill>
+          <a:ln/>
+        </p:spPr>
+      </p:sp>
+      <p:sp>
+        <p:nvSpPr>
+          <p:cNvPr id="4" name="Business model circle"/>
+          <p:cNvSpPr/>
+          <p:nvPr/>
+        </p:nvSpPr>
+        <p:spPr>
+          <a:xfrm>
+            <a:off x="868680" y="1645920"/>
+            <a:ext cx="548640" cy="548640"/>
+          </a:xfrm>
+          <a:prstGeom prst="ellipse">
+            <a:avLst/>
+          </a:prstGeom>
+          <a:solidFill>
+            <a:schemeClr val="accent1"/>
+          </a:solidFill>
+          <a:ln/>
+        </p:spPr>
+      </p:sp>
+      <p:pic>
+        <p:nvPicPr>
+          <p:cNvPr id="5" name="Business model icon" descr="preencoded.png">    </p:cNvPr>
+          <p:cNvPicPr>
+            <a:picLocks noChangeAspect="1"/>
+          </p:cNvPicPr>
+          <p:nvPr/>
+        </p:nvPicPr>
+        <p:blipFill>
+          <a:blip r:embed="rId1"/>
+          <a:stretch>
+            <a:fillRect/>
+          </a:stretch>
+        </p:blipFill>
+        <p:spPr>
+          <a:xfrm>
+            <a:off x="1005840" y="1783080"/>
+            <a:ext cx="274320" cy="274320"/>
+          </a:xfrm>
+          <a:prstGeom prst="rect">
+            <a:avLst/>
+          </a:prstGeom>
+        </p:spPr>
+      </p:pic>
+      <p:sp>
+        <p:nvSpPr>
+          <p:cNvPr id="6" name="Business model title"/>
+          <p:cNvSpPr txBox="1"/>
+          <p:nvPr/>
+        </p:nvSpPr>
+        <p:spPr>
+          <a:xfrm>
+            <a:off x="1600200" y="1645920"/>
+            <a:ext cx="4038448" cy="548640"/>
+          </a:xfrm>
+          <a:prstGeom prst="rect">
+            <a:avLst/>
+          </a:prstGeom>
+          <a:noFill/>
+          <a:ln/>
+        </p:spPr>
+        <p:txBody>
+          <a:bodyPr wrap="square" lIns="0" tIns="0" rIns="0" bIns="0" rtlCol="0" anchor="ctr"/>
+          <a:lstStyle/>
+          <a:p>
+            <a:pPr indent="0" marL="0">
+              <a:buNone/>
+            </a:pPr>
+            <a:r>
+              <a:rPr lang="en-US" sz="2000" b="1" dirty="0">
+                <a:solidFill>
+                  <a:schemeClr val="tx1"/>
+                </a:solidFill>
+              </a:rPr>
+              <a:t>Business model</a:t>
+            </a:r>
+            <a:endParaRPr lang="en-US" sz="2000" dirty="0"/>
+          </a:p>
+        </p:txBody>
+      </p:sp>
+      <p:sp>
+        <p:nvSpPr>
+          <p:cNvPr id="7" name="Business model list"/>
+          <p:cNvSpPr txBox="1"/>
+          <p:nvPr/>
+        </p:nvSpPr>
+        <p:spPr>
+          <a:xfrm>
+            <a:off x="914400" y="2468880"/>
+            <a:ext cx="4678528" cy="3017520"/>
+          </a:xfrm>
+          <a:prstGeom prst="rect">
+            <a:avLst/>
+          </a:prstGeom>
+          <a:noFill/>
+          <a:ln/>
+        </p:spPr>
+        <p:txBody>
+          <a:bodyPr wrap="square" lIns="0" tIns="0" rIns="0" bIns="0" rtlCol="0" anchor="t"/>
+          <a:lstStyle/>
+          <a:p>
+            <a:pPr marL="228600" indent="-228600">
+              <a:spcAft>
+                <a:spcPts val="1000"/>
+              </a:spcAft>
+              <a:buSzPct val="100000"/>
+              <a:buChar char="•"/>
+            </a:pPr>
+            <a:r>
+              <a:rPr lang="en-US" sz="1600" dirty="0">
+                <a:solidFill>
+                  <a:schemeClr val="tx1"/>
+                </a:solidFill>
+              </a:rPr>
+              <a:t>Free core app for every student</a:t>
+            </a:r>
+            <a:endParaRPr lang="en-US" sz="1600" dirty="0"/>
+          </a:p>
+          <a:p>
+            <a:pPr marL="228600" indent="-228600">
+              <a:spcAft>
+                <a:spcPts val="1000"/>
+              </a:spcAft>
+              <a:buSzPct val="100000"/>
+              <a:buChar char="•"/>
+            </a:pPr>
+            <a:r>
+              <a:rPr lang="en-US" sz="1600" dirty="0">
+                <a:solidFill>
+                  <a:schemeClr val="tx1"/>
+                </a:solidFill>
+              </a:rPr>
+              <a:t>College licence: LAN server and class readiness dashboards</a:t>
+            </a:r>
+            <a:endParaRPr lang="en-US" sz="1600" dirty="0"/>
+          </a:p>
+          <a:p>
+            <a:pPr marL="228600" indent="-228600">
+              <a:spcAft>
+                <a:spcPts val="1000"/>
+              </a:spcAft>
+              <a:buSzPct val="100000"/>
+              <a:buChar char="•"/>
+            </a:pPr>
+            <a:r>
+              <a:rPr lang="en-US" sz="1600" dirty="0">
+                <a:solidFill>
+                  <a:schemeClr val="tx1"/>
+                </a:solidFill>
+              </a:rPr>
+              <a:t>White-label quiz generation for ed-tech and coaching</a:t>
+            </a:r>
+            <a:endParaRPr lang="en-US" sz="1600" dirty="0"/>
+          </a:p>
+          <a:p>
+            <a:pPr marL="228600" indent="-228600">
+              <a:spcAft>
+                <a:spcPts val="1000"/>
+              </a:spcAft>
+              <a:buSzPct val="100000"/>
+              <a:buChar char="•"/>
+            </a:pPr>
+            <a:r>
+              <a:rPr lang="en-US" sz="1600" dirty="0">
+                <a:solidFill>
+                  <a:schemeClr val="tx1"/>
+                </a:solidFill>
+              </a:rPr>
+              <a:t>Premium packs: Tamil/Hindi support, PDF import</a:t>
+            </a:r>
+            <a:endParaRPr lang="en-US" sz="1600" dirty="0"/>
+          </a:p>
+        </p:txBody>
+      </p:sp>
+      <p:sp>
+        <p:nvSpPr>
+          <p:cNvPr id="8" name="Future scope card"/>
+          <p:cNvSpPr/>
+          <p:nvPr/>
+        </p:nvSpPr>
+        <p:spPr>
+          <a:xfrm>
+            <a:off x="6233008" y="1371600"/>
+            <a:ext cx="5410048" cy="4297680"/>
+          </a:xfrm>
+          <a:prstGeom prst="roundRect">
+            <a:avLst>
+              <a:gd name="adj" fmla="val 2553"/>
+            </a:avLst>
+          </a:prstGeom>
+          <a:solidFill>
+            <a:schemeClr val="accent2"/>
+          </a:solidFill>
+          <a:ln/>
+        </p:spPr>
+      </p:sp>
+      <p:sp>
+        <p:nvSpPr>
+          <p:cNvPr id="9" name="Future scope circle"/>
+          <p:cNvSpPr/>
+          <p:nvPr/>
+        </p:nvSpPr>
+        <p:spPr>
+          <a:xfrm>
+            <a:off x="6553048" y="1645920"/>
+            <a:ext cx="548640" cy="548640"/>
+          </a:xfrm>
+          <a:prstGeom prst="ellipse">
+            <a:avLst/>
+          </a:prstGeom>
+          <a:solidFill>
+            <a:schemeClr val="accent1"/>
+          </a:solidFill>
+          <a:ln/>
+        </p:spPr>
+      </p:sp>
+      <p:pic>
+        <p:nvPicPr>
+          <p:cNvPr id="10" name="Future scope icon" descr="preencoded.png">    </p:cNvPr>
+          <p:cNvPicPr>
+            <a:picLocks noChangeAspect="1"/>
+          </p:cNvPicPr>
+          <p:nvPr/>
+        </p:nvPicPr>
+        <p:blipFill>
+          <a:blip r:embed="rId2"/>
+          <a:stretch>
+            <a:fillRect/>
+          </a:stretch>
+        </p:blipFill>
+        <p:spPr>
+          <a:xfrm>
+            <a:off x="6690208" y="1783080"/>
+            <a:ext cx="274320" cy="274320"/>
+          </a:xfrm>
+          <a:prstGeom prst="rect">
+            <a:avLst/>
+          </a:prstGeom>
+        </p:spPr>
+      </p:pic>
+      <p:sp>
+        <p:nvSpPr>
+          <p:cNvPr id="11" name="Future scope title"/>
+          <p:cNvSpPr txBox="1"/>
+          <p:nvPr/>
+        </p:nvSpPr>
+        <p:spPr>
+          <a:xfrm>
+            <a:off x="7284568" y="1645920"/>
+            <a:ext cx="4038448" cy="548640"/>
+          </a:xfrm>
+          <a:prstGeom prst="rect">
+            <a:avLst/>
+          </a:prstGeom>
+          <a:noFill/>
+          <a:ln/>
+        </p:spPr>
+        <p:txBody>
+          <a:bodyPr wrap="square" lIns="0" tIns="0" rIns="0" bIns="0" rtlCol="0" anchor="ctr"/>
+          <a:lstStyle/>
+          <a:p>
+            <a:pPr indent="0" marL="0">
+              <a:buNone/>
+            </a:pPr>
+            <a:r>
+              <a:rPr lang="en-US" sz="2000" b="1" dirty="0">
+                <a:solidFill>
+                  <a:schemeClr val="tx1"/>
+                </a:solidFill>
+              </a:rPr>
+              <a:t>Future scope</a:t>
+            </a:r>
+            <a:endParaRPr lang="en-US" sz="2000" dirty="0"/>
+          </a:p>
+        </p:txBody>
+      </p:sp>
+      <p:sp>
+        <p:nvSpPr>
+          <p:cNvPr id="12" name="Future scope list"/>
+          <p:cNvSpPr txBox="1"/>
+          <p:nvPr/>
+        </p:nvSpPr>
+        <p:spPr>
+          <a:xfrm>
+            <a:off x="6598768" y="2468880"/>
+            <a:ext cx="4678528" cy="3017520"/>
+          </a:xfrm>
+          <a:prstGeom prst="rect">
+            <a:avLst/>
+          </a:prstGeom>
+          <a:noFill/>
+          <a:ln/>
+        </p:spPr>
+        <p:txBody>
+          <a:bodyPr wrap="square" lIns="0" tIns="0" rIns="0" bIns="0" rtlCol="0" anchor="t"/>
+          <a:lstStyle/>
+          <a:p>
+            <a:pPr marL="228600" indent="-228600">
+              <a:spcAft>
+                <a:spcPts val="1000"/>
+              </a:spcAft>
+              <a:buSzPct val="100000"/>
+              <a:buChar char="•"/>
+            </a:pPr>
+            <a:r>
+              <a:rPr lang="en-US" sz="1600" dirty="0">
+                <a:solidFill>
+                  <a:schemeClr val="tx1"/>
+                </a:solidFill>
+              </a:rPr>
+              <a:t>PDF and offline OCR import</a:t>
+            </a:r>
+            <a:endParaRPr lang="en-US" sz="1600" dirty="0"/>
+          </a:p>
+          <a:p>
+            <a:pPr marL="228600" indent="-228600">
+              <a:spcAft>
+                <a:spcPts val="1000"/>
+              </a:spcAft>
+              <a:buSzPct val="100000"/>
+              <a:buChar char="•"/>
+            </a:pPr>
+            <a:r>
+              <a:rPr lang="en-US" sz="1600" dirty="0">
+                <a:solidFill>
+                  <a:schemeClr val="tx1"/>
+                </a:solidFill>
+              </a:rPr>
+              <a:t>Tamil and Hindi tokenisers and stemmers</a:t>
+            </a:r>
+            <a:endParaRPr lang="en-US" sz="1600" dirty="0"/>
+          </a:p>
+          <a:p>
+            <a:pPr marL="228600" indent="-228600">
+              <a:spcAft>
+                <a:spcPts val="1000"/>
+              </a:spcAft>
+              <a:buSzPct val="100000"/>
+              <a:buChar char="•"/>
+            </a:pPr>
+            <a:r>
+              <a:rPr lang="en-US" sz="1600" dirty="0">
+                <a:solidFill>
+                  <a:schemeClr val="tx1"/>
+                </a:solidFill>
+              </a:rPr>
+              <a:t>Synonym-aware query expansion</a:t>
+            </a:r>
+            <a:endParaRPr lang="en-US" sz="1600" dirty="0"/>
+          </a:p>
+          <a:p>
+            <a:pPr marL="228600" indent="-228600">
+              <a:spcAft>
+                <a:spcPts val="1000"/>
+              </a:spcAft>
+              <a:buSzPct val="100000"/>
+              <a:buChar char="•"/>
+            </a:pPr>
+            <a:r>
+              <a:rPr lang="en-US" sz="1600" dirty="0">
+                <a:solidFill>
+                  <a:schemeClr val="tx1"/>
+                </a:solidFill>
+              </a:rPr>
+              <a:t>FSRS scheduler and exam-date planner</a:t>
+            </a:r>
+            <a:endParaRPr lang="en-US" sz="1600" dirty="0"/>
+          </a:p>
+          <a:p>
+            <a:pPr marL="228600" indent="-228600">
+              <a:spcAft>
+                <a:spcPts val="1000"/>
+              </a:spcAft>
+              <a:buSzPct val="100000"/>
+              <a:buChar char="•"/>
+            </a:pPr>
+            <a:r>
+              <a:rPr lang="en-US" sz="1600" dirty="0">
+                <a:solidFill>
+                  <a:schemeClr val="tx1"/>
+                </a:solidFill>
+              </a:rPr>
+              <a:t>Faculty mode with class-level weak-concept view</a:t>
+            </a:r>
+            <a:endParaRPr lang="en-US" sz="1600" dirty="0"/>
+          </a:p>
+        </p:txBody>
+      </p:sp>
+      <p:sp>
+        <p:nvSpPr>
+          <p:cNvPr id="25" name="Slide Number Placeholder 0"/>
+          <p:cNvSpPr>
+            <a:spLocks noGrp="1"/>
+          </p:cNvSpPr>
+          <p:nvPr>
+            <p:ph type="sldNum" sz="quarter" idx="4294967295"/>
+          </p:nvPr>
+        </p:nvSpPr>
+        <p:spPr>
+          <a:xfrm>
+            <a:off x="11094415" y="6400800"/>
+            <a:ext cx="548640" cy="274320"/>
+          </a:xfrm>
+          <a:prstGeom prst="rect">
+            <a:avLst/>
+          </a:prstGeom>
+          <a:extLst>
+            <a:ext uri="{C572A759-6A51-4108-AA02-DFA0A04FC94B}">
+              <ma14:wrappingTextBoxFlag xmlns:ma14="http://schemas.microsoft.com/office/mac/drawingml/2011/main" val="0"/>
+            </a:ext>
+          </a:extLst>
+        </p:spPr>
+        <p:txBody>
+          <a:bodyPr/>
+          <a:lstStyle>
+            <a:lvl1pPr>
+              <a:defRPr sz="1000">
+                <a:solidFill>
+                  <a:schemeClr val="accent4"/>
+                </a:solidFill>
+              </a:defRPr>
+            </a:lvl1pPr>
+          </a:lstStyle>
+          <a:p>
+            <a:pPr algn="r"/>
+            <a:fld id="{F7021451-1387-4CA6-816F-3879F97B5CBC}" type="slidenum">
+              <a:rPr b="0" lang="en-US"/>
+              <a:t>11</a:t>
+            </a:fld>
+            <a:endParaRPr lang="en-US"/>
+          </a:p>
+        </p:txBody>
+      </p:sp>
+    </p:spTree>
+  </p:cSld>
+  <p:clrMapOvr>
+    <a:masterClrMapping/>
+  </p:clrMapOvr>
+</p:sld>
+</file>
+
+<file path=ppt/slides/slide12.xml><?xml version="1.0" encoding="utf-8"?>
+<p:sld xmlns:a="http://schemas.openxmlformats.org/drawingml/2006/main" xmlns:r="http://schemas.openxmlformats.org/officeDocument/2006/relationships" xmlns:p="http://schemas.openxmlformats.org/presentationml/2006/main">
+  <p:cSld name="Slide 12">
+    <p:spTree>
+      <p:nvGrpSpPr>
+        <p:cNvPr id="1" name=""/>
+        <p:cNvGrpSpPr/>
+        <p:nvPr/>
+      </p:nvGrpSpPr>
+      <p:grpSpPr>
+        <a:xfrm>
+          <a:off x="0" y="0"/>
+          <a:ext cx="0" cy="0"/>
+          <a:chOff x="0" y="0"/>
+          <a:chExt cx="0" cy="0"/>
+        </a:xfrm>
+      </p:grpSpPr>
+      <p:sp>
+        <p:nvSpPr>
           <p:cNvPr id="2" name="Thanks"/>
           <p:cNvSpPr txBox="1"/>
           <p:nvPr/>
@@ -3837,7 +4731,7 @@
       </p:sp>
       <p:pic>
         <p:nvPicPr>
-          <p:cNvPr id="7" name="Solution screenshot" descr="StudyPilot screenshot">    </p:cNvPr>
+          <p:cNvPr id="7" name="Solution screenshot" descr="StudyPilot screenshot: Concepts">    </p:cNvPr>
           <p:cNvPicPr>
             <a:picLocks noChangeAspect="1"/>
           </p:cNvPicPr>
@@ -3859,6 +4753,53 @@
           </a:prstGeom>
         </p:spPr>
       </p:pic>
+      <p:sp>
+        <p:nvSpPr>
+          <p:cNvPr id="8" name="Solution screenshot caption"/>
+          <p:cNvSpPr txBox="1"/>
+          <p:nvPr/>
+        </p:nvSpPr>
+        <p:spPr>
+          <a:xfrm>
+            <a:off x="6446520" y="4993767"/>
+            <a:ext cx="5166360" cy="274320"/>
+          </a:xfrm>
+          <a:prstGeom prst="rect">
+            <a:avLst/>
+          </a:prstGeom>
+          <a:noFill/>
+          <a:ln/>
+        </p:spPr>
+        <p:txBody>
+          <a:bodyPr wrap="square" lIns="0" tIns="0" rIns="0" bIns="0" rtlCol="0" anchor="ctr"/>
+          <a:lstStyle/>
+          <a:p>
+            <a:pPr algn="ctr" indent="0" marL="0">
+              <a:buNone/>
+            </a:pPr>
+            <a:r>
+              <a:rPr lang="en-US" sz="1200" dirty="0">
+                <a:solidFill>
+                  <a:schemeClr val="accent1"/>
+                </a:solidFill>
+              </a:rPr>
+              <a:t>▸ </a:t>
+            </a:r>
+            <a:pPr algn="ctr" indent="0" marL="0">
+              <a:buNone/>
+            </a:pPr>
+            <a:r>
+              <a:rPr lang="en-US" sz="1200" dirty="0">
+                <a:solidFill>
+                  <a:schemeClr val="accent4"/>
+                </a:solidFill>
+              </a:rPr>
+              <a:t>Concepts</a:t>
+            </a:r>
+            <a:endParaRPr lang="en-US" sz="1200" dirty="0"/>
+          </a:p>
+        </p:txBody>
+      </p:sp>
       <p:sp>
         <p:nvSpPr>
           <p:cNvPr id="25" name="Slide Number Placeholder 0"/>
@@ -6979,573 +7920,1677 @@
                   <a:schemeClr val="tx1"/>
                 </a:solidFill>
               </a:rPr>
-              <a:t>Measured results</a:t>
+              <a:t>How we compare</a:t>
             </a:r>
             <a:endParaRPr lang="en-US" sz="3600" dirty="0"/>
           </a:p>
         </p:txBody>
       </p:sp>
-      <p:sp>
-        <p:nvSpPr>
-          <p:cNvPr id="3" name="Result 1 card"/>
-          <p:cNvSpPr/>
-          <p:nvPr/>
-        </p:nvSpPr>
-        <p:spPr>
-          <a:xfrm>
-            <a:off x="548640" y="1463040"/>
-            <a:ext cx="2567864" cy="2377440"/>
-          </a:xfrm>
-          <a:prstGeom prst="roundRect">
-            <a:avLst>
-              <a:gd name="adj" fmla="val 4615"/>
-            </a:avLst>
-          </a:prstGeom>
-          <a:solidFill>
-            <a:schemeClr val="tx2"/>
-          </a:solidFill>
-          <a:ln/>
-          <a:effectLst>
-            <a:outerShdw sx="100000" sy="100000" kx="0" ky="0" algn="bl" rotWithShape="0" blurRad="101600" dist="25400" dir="5400000">
-              <a:srgbClr val="000000">
-                <a:alpha val="14000"/>
-              </a:srgbClr>
-            </a:outerShdw>
-          </a:effectLst>
-        </p:spPr>
-      </p:sp>
-      <p:sp>
-        <p:nvSpPr>
-          <p:cNvPr id="4" name="Result 1 value"/>
-          <p:cNvSpPr txBox="1"/>
-          <p:nvPr/>
-        </p:nvSpPr>
-        <p:spPr>
-          <a:xfrm>
-            <a:off x="777240" y="1645920"/>
-            <a:ext cx="2110664" cy="1097280"/>
-          </a:xfrm>
-          <a:prstGeom prst="rect">
-            <a:avLst/>
-          </a:prstGeom>
-          <a:noFill/>
-          <a:ln/>
-        </p:spPr>
-        <p:txBody>
-          <a:bodyPr wrap="square" lIns="0" tIns="0" rIns="0" bIns="0" rtlCol="0" anchor="ctr">
-            <a:normAutofit/>
-          </a:bodyPr>
-          <a:lstStyle/>
-          <a:p>
-            <a:pPr algn="ctr" indent="0" marL="0">
-              <a:buNone/>
-            </a:pPr>
-            <a:r>
-              <a:rPr lang="en-US" sz="4000" b="1" dirty="0">
-                <a:solidFill>
-                  <a:schemeClr val="accent6"/>
-                </a:solidFill>
-              </a:rPr>
-              <a:t>0.526</a:t>
-            </a:r>
-            <a:endParaRPr lang="en-US" sz="4000" dirty="0"/>
-          </a:p>
-        </p:txBody>
-      </p:sp>
-      <p:sp>
-        <p:nvSpPr>
-          <p:cNvPr id="5" name="Result 1 label"/>
-          <p:cNvSpPr txBox="1"/>
-          <p:nvPr/>
-        </p:nvSpPr>
-        <p:spPr>
-          <a:xfrm>
-            <a:off x="777240" y="2743200"/>
-            <a:ext cx="2110664" cy="914400"/>
-          </a:xfrm>
-          <a:prstGeom prst="rect">
-            <a:avLst/>
-          </a:prstGeom>
-          <a:noFill/>
-          <a:ln/>
-        </p:spPr>
-        <p:txBody>
-          <a:bodyPr wrap="square" lIns="0" tIns="0" rIns="0" bIns="0" rtlCol="0" anchor="t"/>
-          <a:lstStyle/>
-          <a:p>
-            <a:pPr algn="ctr" indent="0" marL="0">
-              <a:buNone/>
-            </a:pPr>
-            <a:r>
-              <a:rPr lang="en-US" sz="1400" dirty="0">
-                <a:solidFill>
-                  <a:schemeClr val="bg1"/>
-                </a:solidFill>
-              </a:rPr>
-              <a:t>ROUGE-1 F1 vs reference (Lead-6: 0.465)</a:t>
-            </a:r>
-            <a:endParaRPr lang="en-US" sz="1400" dirty="0"/>
-          </a:p>
-        </p:txBody>
-      </p:sp>
-      <p:sp>
-        <p:nvSpPr>
-          <p:cNvPr id="6" name="Result 2 card"/>
-          <p:cNvSpPr/>
-          <p:nvPr/>
-        </p:nvSpPr>
-        <p:spPr>
-          <a:xfrm>
-            <a:off x="3390824" y="1463040"/>
-            <a:ext cx="2567864" cy="2377440"/>
-          </a:xfrm>
-          <a:prstGeom prst="roundRect">
-            <a:avLst>
-              <a:gd name="adj" fmla="val 4615"/>
-            </a:avLst>
-          </a:prstGeom>
-          <a:solidFill>
-            <a:schemeClr val="tx2"/>
-          </a:solidFill>
-          <a:ln/>
-          <a:effectLst>
-            <a:outerShdw sx="100000" sy="100000" kx="0" ky="0" algn="bl" rotWithShape="0" blurRad="101600" dist="25400" dir="5400000">
-              <a:srgbClr val="000000">
-                <a:alpha val="14000"/>
-              </a:srgbClr>
-            </a:outerShdw>
-          </a:effectLst>
-        </p:spPr>
-      </p:sp>
-      <p:sp>
-        <p:nvSpPr>
-          <p:cNvPr id="7" name="Result 2 value"/>
-          <p:cNvSpPr txBox="1"/>
-          <p:nvPr/>
-        </p:nvSpPr>
-        <p:spPr>
-          <a:xfrm>
-            <a:off x="3619424" y="1645920"/>
-            <a:ext cx="2110664" cy="1097280"/>
-          </a:xfrm>
-          <a:prstGeom prst="rect">
-            <a:avLst/>
-          </a:prstGeom>
-          <a:noFill/>
-          <a:ln/>
-        </p:spPr>
-        <p:txBody>
-          <a:bodyPr wrap="square" lIns="0" tIns="0" rIns="0" bIns="0" rtlCol="0" anchor="ctr">
-            <a:normAutofit/>
-          </a:bodyPr>
-          <a:lstStyle/>
-          <a:p>
-            <a:pPr algn="ctr" indent="0" marL="0">
-              <a:buNone/>
-            </a:pPr>
-            <a:r>
-              <a:rPr lang="en-US" sz="4000" b="1" dirty="0">
-                <a:solidFill>
-                  <a:schemeClr val="accent6"/>
-                </a:solidFill>
-              </a:rPr>
-              <a:t>100%</a:t>
-            </a:r>
-            <a:endParaRPr lang="en-US" sz="4000" dirty="0"/>
-          </a:p>
-        </p:txBody>
-      </p:sp>
-      <p:sp>
-        <p:nvSpPr>
-          <p:cNvPr id="8" name="Result 2 label"/>
-          <p:cNvSpPr txBox="1"/>
-          <p:nvPr/>
-        </p:nvSpPr>
-        <p:spPr>
-          <a:xfrm>
-            <a:off x="3619424" y="2743200"/>
-            <a:ext cx="2110664" cy="914400"/>
-          </a:xfrm>
-          <a:prstGeom prst="rect">
-            <a:avLst/>
-          </a:prstGeom>
-          <a:noFill/>
-          <a:ln/>
-        </p:spPr>
-        <p:txBody>
-          <a:bodyPr wrap="square" lIns="0" tIns="0" rIns="0" bIns="0" rtlCol="0" anchor="t"/>
-          <a:lstStyle/>
-          <a:p>
-            <a:pPr algn="ctr" indent="0" marL="0">
-              <a:buNone/>
-            </a:pPr>
-            <a:r>
-              <a:rPr lang="en-US" sz="1400" dirty="0">
-                <a:solidFill>
-                  <a:schemeClr val="bg1"/>
-                </a:solidFill>
-              </a:rPr>
-              <a:t>QA top-3 hit rate on 31 questions (top-1 80.6%)</a:t>
-            </a:r>
-            <a:endParaRPr lang="en-US" sz="1400" dirty="0"/>
-          </a:p>
-        </p:txBody>
-      </p:sp>
-      <p:sp>
-        <p:nvSpPr>
-          <p:cNvPr id="9" name="Result 3 card"/>
-          <p:cNvSpPr/>
-          <p:nvPr/>
-        </p:nvSpPr>
-        <p:spPr>
-          <a:xfrm>
-            <a:off x="6233008" y="1463040"/>
-            <a:ext cx="2567864" cy="2377440"/>
-          </a:xfrm>
-          <a:prstGeom prst="roundRect">
-            <a:avLst>
-              <a:gd name="adj" fmla="val 4615"/>
-            </a:avLst>
-          </a:prstGeom>
-          <a:solidFill>
-            <a:schemeClr val="tx2"/>
-          </a:solidFill>
-          <a:ln/>
-          <a:effectLst>
-            <a:outerShdw sx="100000" sy="100000" kx="0" ky="0" algn="bl" rotWithShape="0" blurRad="101600" dist="25400" dir="5400000">
-              <a:srgbClr val="000000">
-                <a:alpha val="14000"/>
-              </a:srgbClr>
-            </a:outerShdw>
-          </a:effectLst>
-        </p:spPr>
-      </p:sp>
-      <p:sp>
-        <p:nvSpPr>
-          <p:cNvPr id="10" name="Result 3 value"/>
-          <p:cNvSpPr txBox="1"/>
-          <p:nvPr/>
-        </p:nvSpPr>
-        <p:spPr>
-          <a:xfrm>
-            <a:off x="6461608" y="1645920"/>
-            <a:ext cx="2110664" cy="1097280"/>
-          </a:xfrm>
-          <a:prstGeom prst="rect">
-            <a:avLst/>
-          </a:prstGeom>
-          <a:noFill/>
-          <a:ln/>
-        </p:spPr>
-        <p:txBody>
-          <a:bodyPr wrap="square" lIns="0" tIns="0" rIns="0" bIns="0" rtlCol="0" anchor="ctr">
-            <a:normAutofit/>
-          </a:bodyPr>
-          <a:lstStyle/>
-          <a:p>
-            <a:pPr algn="ctr" indent="0" marL="0">
-              <a:buNone/>
-            </a:pPr>
-            <a:r>
-              <a:rPr lang="en-US" sz="4000" b="1" dirty="0">
-                <a:solidFill>
-                  <a:schemeClr val="accent6"/>
-                </a:solidFill>
-              </a:rPr>
-              <a:t>~6 ms</a:t>
-            </a:r>
-            <a:endParaRPr lang="en-US" sz="4000" dirty="0"/>
-          </a:p>
-        </p:txBody>
-      </p:sp>
-      <p:sp>
-        <p:nvSpPr>
-          <p:cNvPr id="11" name="Result 3 label"/>
-          <p:cNvSpPr txBox="1"/>
-          <p:nvPr/>
-        </p:nvSpPr>
-        <p:spPr>
-          <a:xfrm>
-            <a:off x="6461608" y="2743200"/>
-            <a:ext cx="2110664" cy="914400"/>
-          </a:xfrm>
-          <a:prstGeom prst="rect">
-            <a:avLst/>
-          </a:prstGeom>
-          <a:noFill/>
-          <a:ln/>
-        </p:spPr>
-        <p:txBody>
-          <a:bodyPr wrap="square" lIns="0" tIns="0" rIns="0" bIns="0" rtlCol="0" anchor="t"/>
-          <a:lstStyle/>
-          <a:p>
-            <a:pPr algn="ctr" indent="0" marL="0">
-              <a:buNone/>
-            </a:pPr>
-            <a:r>
-              <a:rPr lang="en-US" sz="1400" dirty="0">
-                <a:solidFill>
-                  <a:schemeClr val="bg1"/>
-                </a:solidFill>
-              </a:rPr>
-              <a:t>full analysis of a 780-word note set</a:t>
-            </a:r>
-            <a:endParaRPr lang="en-US" sz="1400" dirty="0"/>
-          </a:p>
-        </p:txBody>
-      </p:sp>
-      <p:sp>
-        <p:nvSpPr>
-          <p:cNvPr id="12" name="Result 4 card"/>
-          <p:cNvSpPr/>
-          <p:nvPr/>
-        </p:nvSpPr>
-        <p:spPr>
-          <a:xfrm>
-            <a:off x="9075191" y="1463040"/>
-            <a:ext cx="2567864" cy="2377440"/>
-          </a:xfrm>
-          <a:prstGeom prst="roundRect">
-            <a:avLst>
-              <a:gd name="adj" fmla="val 4615"/>
-            </a:avLst>
-          </a:prstGeom>
-          <a:solidFill>
-            <a:schemeClr val="tx2"/>
-          </a:solidFill>
-          <a:ln/>
-          <a:effectLst>
-            <a:outerShdw sx="100000" sy="100000" kx="0" ky="0" algn="bl" rotWithShape="0" blurRad="101600" dist="25400" dir="5400000">
-              <a:srgbClr val="000000">
-                <a:alpha val="14000"/>
-              </a:srgbClr>
-            </a:outerShdw>
-          </a:effectLst>
-        </p:spPr>
-      </p:sp>
-      <p:sp>
-        <p:nvSpPr>
-          <p:cNvPr id="13" name="Result 4 value"/>
-          <p:cNvSpPr txBox="1"/>
-          <p:nvPr/>
-        </p:nvSpPr>
-        <p:spPr>
-          <a:xfrm>
-            <a:off x="9303791" y="1645920"/>
-            <a:ext cx="2110664" cy="1097280"/>
-          </a:xfrm>
-          <a:prstGeom prst="rect">
-            <a:avLst/>
-          </a:prstGeom>
-          <a:noFill/>
-          <a:ln/>
-        </p:spPr>
-        <p:txBody>
-          <a:bodyPr wrap="square" lIns="0" tIns="0" rIns="0" bIns="0" rtlCol="0" anchor="ctr">
-            <a:normAutofit/>
-          </a:bodyPr>
-          <a:lstStyle/>
-          <a:p>
-            <a:pPr algn="ctr" indent="0" marL="0">
-              <a:buNone/>
-            </a:pPr>
-            <a:r>
-              <a:rPr lang="en-US" sz="4000" b="1" dirty="0">
-                <a:solidFill>
-                  <a:schemeClr val="accent6"/>
-                </a:solidFill>
-              </a:rPr>
-              <a:t>~1 ms</a:t>
-            </a:r>
-            <a:endParaRPr lang="en-US" sz="4000" dirty="0"/>
-          </a:p>
-        </p:txBody>
-      </p:sp>
-      <p:sp>
-        <p:nvSpPr>
-          <p:cNvPr id="14" name="Result 4 label"/>
-          <p:cNvSpPr txBox="1"/>
-          <p:nvPr/>
-        </p:nvSpPr>
-        <p:spPr>
-          <a:xfrm>
-            <a:off x="9303791" y="2743200"/>
-            <a:ext cx="2110664" cy="914400"/>
-          </a:xfrm>
-          <a:prstGeom prst="rect">
-            <a:avLst/>
-          </a:prstGeom>
-          <a:noFill/>
-          <a:ln/>
-        </p:spPr>
-        <p:txBody>
-          <a:bodyPr wrap="square" lIns="0" tIns="0" rIns="0" bIns="0" rtlCol="0" anchor="t"/>
-          <a:lstStyle/>
-          <a:p>
-            <a:pPr algn="ctr" indent="0" marL="0">
-              <a:buNone/>
-            </a:pPr>
-            <a:r>
-              <a:rPr lang="en-US" sz="1400" dirty="0">
-                <a:solidFill>
-                  <a:schemeClr val="bg1"/>
-                </a:solidFill>
-              </a:rPr>
-              <a:t>Ask-your-notes HTTP round trip</a:t>
-            </a:r>
-            <a:endParaRPr lang="en-US" sz="1400" dirty="0"/>
-          </a:p>
-        </p:txBody>
-      </p:sp>
-      <p:sp>
-        <p:nvSpPr>
-          <p:cNvPr id="15" name="Results caveat"/>
-          <p:cNvSpPr txBox="1"/>
-          <p:nvPr/>
-        </p:nvSpPr>
-        <p:spPr>
-          <a:xfrm>
-            <a:off x="548640" y="4160520"/>
-            <a:ext cx="11094415" cy="457200"/>
-          </a:xfrm>
-          <a:prstGeom prst="rect">
-            <a:avLst/>
-          </a:prstGeom>
-          <a:noFill/>
-          <a:ln/>
-        </p:spPr>
-        <p:txBody>
-          <a:bodyPr wrap="square" lIns="0" tIns="0" rIns="0" bIns="0" rtlCol="0" anchor="ctr"/>
-          <a:lstStyle/>
-          <a:p>
-            <a:pPr indent="0" marL="0">
-              <a:buNone/>
-            </a:pPr>
-            <a:r>
-              <a:rPr lang="en-US" sz="1200" i="1" dirty="0">
-                <a:solidFill>
-                  <a:schemeClr val="accent4"/>
-                </a:solidFill>
-              </a:rPr>
-              <a:t>Measured on held-out data generated by the project (see REPORT.md for method). Real-world performance needs field validation.</a:t>
-            </a:r>
-            <a:endParaRPr lang="en-US" sz="1200" dirty="0"/>
-          </a:p>
-        </p:txBody>
-      </p:sp>
-      <p:sp>
-        <p:nvSpPr>
-          <p:cNvPr id="16" name="Impact strip"/>
-          <p:cNvSpPr/>
-          <p:nvPr/>
-        </p:nvSpPr>
-        <p:spPr>
-          <a:xfrm>
-            <a:off x="548640" y="4754880"/>
-            <a:ext cx="11094415" cy="1371600"/>
-          </a:xfrm>
-          <a:prstGeom prst="roundRect">
-            <a:avLst>
-              <a:gd name="adj" fmla="val 8000"/>
-            </a:avLst>
-          </a:prstGeom>
-          <a:solidFill>
-            <a:schemeClr val="accent2"/>
-          </a:solidFill>
-          <a:ln/>
-        </p:spPr>
-      </p:sp>
-      <p:sp>
-        <p:nvSpPr>
-          <p:cNvPr id="17" name="Impact circle"/>
-          <p:cNvSpPr/>
-          <p:nvPr/>
-        </p:nvSpPr>
-        <p:spPr>
-          <a:xfrm>
-            <a:off x="822960" y="5120640"/>
-            <a:ext cx="640080" cy="640080"/>
-          </a:xfrm>
-          <a:prstGeom prst="ellipse">
-            <a:avLst/>
-          </a:prstGeom>
-          <a:solidFill>
-            <a:schemeClr val="accent1"/>
-          </a:solidFill>
-          <a:ln/>
-        </p:spPr>
-      </p:sp>
-      <p:pic>
-        <p:nvPicPr>
-          <p:cNvPr id="18" name="Impact icon" descr="preencoded.png">    </p:cNvPr>
-          <p:cNvPicPr>
-            <a:picLocks noChangeAspect="1"/>
-          </p:cNvPicPr>
-          <p:nvPr/>
-        </p:nvPicPr>
-        <p:blipFill>
-          <a:blip r:embed="rId1"/>
-          <a:stretch>
-            <a:fillRect/>
-          </a:stretch>
-        </p:blipFill>
-        <p:spPr>
-          <a:xfrm>
-            <a:off x="982980" y="5280660"/>
-            <a:ext cx="320040" cy="320040"/>
-          </a:xfrm>
-          <a:prstGeom prst="rect">
-            <a:avLst/>
-          </a:prstGeom>
-        </p:spPr>
-      </p:pic>
-      <p:sp>
-        <p:nvSpPr>
-          <p:cNvPr id="19" name="Impact text"/>
-          <p:cNvSpPr txBox="1"/>
-          <p:nvPr/>
-        </p:nvSpPr>
-        <p:spPr>
-          <a:xfrm>
-            <a:off x="1737360" y="4754880"/>
-            <a:ext cx="9631375" cy="1371600"/>
-          </a:xfrm>
-          <a:prstGeom prst="rect">
-            <a:avLst/>
-          </a:prstGeom>
-          <a:noFill/>
-          <a:ln/>
-        </p:spPr>
-        <p:txBody>
-          <a:bodyPr wrap="square" lIns="0" tIns="0" rIns="0" bIns="0" rtlCol="0" anchor="ctr"/>
-          <a:lstStyle/>
-          <a:p>
-            <a:pPr indent="0" marL="0">
-              <a:buNone/>
-            </a:pPr>
-            <a:r>
-              <a:rPr lang="en-US" sz="1500" b="1" dirty="0">
-                <a:solidFill>
-                  <a:schemeClr val="accent3"/>
-                </a:solidFill>
-              </a:rPr>
-              <a:t>Impact  </a:t>
-            </a:r>
-            <a:pPr indent="0" marL="0">
-              <a:buNone/>
-            </a:pPr>
-            <a:r>
-              <a:rPr lang="en-US" sz="1500" dirty="0">
-                <a:solidFill>
-                  <a:schemeClr val="tx1"/>
-                </a:solidFill>
-              </a:rPr>
-              <a:t>AI study help for students with poor connectivity  ·  No subscription, no API cost, no mobile data  ·  Notes and progress never leave the device</a:t>
-            </a:r>
-            <a:endParaRPr lang="en-US" sz="1500" dirty="0"/>
-          </a:p>
-        </p:txBody>
-      </p:sp>
+      <p:graphicFrame>
+        <p:nvGraphicFramePr>
+          <p:cNvPr id="9" name="Comparison table"/>
+          <p:cNvGraphicFramePr>
+            <a:graphicFrameLocks noGrp="1"/>
+          </p:cNvGraphicFramePr>
+          <p:nvPr>
+            <p:extLst>
+              <p:ext uri="{D42A27DB-BD31-4B8C-83A1-F6EECF244321}">
+                <p14:modId xmlns:p14="http://schemas.microsoft.com/office/powerpoint/2010/main" val="1579011935"/>
+              </p:ext>
+            </p:extLst>
+          </p:nvPr>
+        </p:nvGraphicFramePr>
+        <p:xfrm>
+          <a:off x="548640" y="1417320"/>
+          <a:ext cx="11094415" cy="914400"/>
+        </p:xfrm>
+        <a:graphic>
+          <a:graphicData uri="http://schemas.openxmlformats.org/drawingml/2006/table">
+            <a:tbl>
+              <a:tblPr/>
+              <a:tblGrid>
+                <a:gridCol w="3749040"/>
+                <a:gridCol w="2448458"/>
+                <a:gridCol w="2448458"/>
+                <a:gridCol w="2448458"/>
+              </a:tblGrid>
+              <a:tr h="713232">
+                <a:tc>
+                  <a:txBody>
+                    <a:bodyPr/>
+                    <a:lstStyle/>
+                    <a:p>
+                      <a:pPr indent="0" marL="0">
+                        <a:buNone/>
+                      </a:pPr>
+                      <a:endParaRPr lang="en-US" sz="1500" dirty="0">
+                        <a:latin typeface="Calibri" charset="0"/>
+                        <a:ea typeface="Calibri" charset="0"/>
+                        <a:cs typeface="Calibri" charset="0"/>
+                      </a:endParaRPr>
+                    </a:p>
+                  </a:txBody>
+                  <a:tcPr marL="128016" marR="128016" marT="36576" marB="36576">
+                    <a:lnL w="12700" cap="flat" cmpd="sng" algn="ctr">
+                      <a:solidFill>
+                        <a:srgbClr val="E2E4F0"/>
+                      </a:solidFill>
+                      <a:prstDash val="solid"/>
+                      <a:round/>
+                      <a:headEnd type="none" w="med" len="med"/>
+                      <a:tailEnd type="none" w="med" len="med"/>
+                    </a:lnL>
+                    <a:lnR w="12700" cap="flat" cmpd="sng" algn="ctr">
+                      <a:solidFill>
+                        <a:srgbClr val="E2E4F0"/>
+                      </a:solidFill>
+                      <a:prstDash val="solid"/>
+                      <a:round/>
+                      <a:headEnd type="none" w="med" len="med"/>
+                      <a:tailEnd type="none" w="med" len="med"/>
+                    </a:lnR>
+                    <a:lnT w="12700" cap="flat" cmpd="sng" algn="ctr">
+                      <a:solidFill>
+                        <a:srgbClr val="E2E4F0"/>
+                      </a:solidFill>
+                      <a:prstDash val="solid"/>
+                      <a:round/>
+                      <a:headEnd type="none" w="med" len="med"/>
+                      <a:tailEnd type="none" w="med" len="med"/>
+                    </a:lnT>
+                    <a:lnB w="12700" cap="flat" cmpd="sng" algn="ctr">
+                      <a:solidFill>
+                        <a:srgbClr val="E2E4F0"/>
+                      </a:solidFill>
+                      <a:prstDash val="solid"/>
+                      <a:round/>
+                      <a:headEnd type="none" w="med" len="med"/>
+                      <a:tailEnd type="none" w="med" len="med"/>
+                    </a:lnB>
+                    <a:solidFill>
+                      <a:schemeClr val="bg1"/>
+                    </a:solidFill>
+                  </a:tcPr>
+                </a:tc>
+                <a:tc>
+                  <a:txBody>
+                    <a:bodyPr/>
+                    <a:lstStyle/>
+                    <a:p>
+                      <a:pPr algn="ctr" indent="0" marL="0">
+                        <a:buNone/>
+                      </a:pPr>
+                      <a:r>
+                        <a:rPr lang="en-US" sz="1500" b="1" dirty="0">
+                          <a:solidFill>
+                            <a:schemeClr val="bg1"/>
+                          </a:solidFill>
+                          <a:latin typeface="Calibri" pitchFamily="34" charset="0"/>
+                          <a:ea typeface="Calibri" pitchFamily="34" charset="-122"/>
+                          <a:cs typeface="Calibri" pitchFamily="34" charset="-120"/>
+                        </a:rPr>
+                        <a:t>Re-reading notes</a:t>
+                      </a:r>
+                      <a:endParaRPr lang="en-US" sz="1500" dirty="0">
+                        <a:latin typeface="Calibri" charset="0"/>
+                        <a:ea typeface="Calibri" charset="0"/>
+                        <a:cs typeface="Calibri" charset="0"/>
+                      </a:endParaRPr>
+                    </a:p>
+                  </a:txBody>
+                  <a:tcPr marL="128016" marR="128016" marT="36576" marB="36576" anchor="ctr">
+                    <a:lnL w="12700" cap="flat" cmpd="sng" algn="ctr">
+                      <a:solidFill>
+                        <a:srgbClr val="E2E4F0"/>
+                      </a:solidFill>
+                      <a:prstDash val="solid"/>
+                      <a:round/>
+                      <a:headEnd type="none" w="med" len="med"/>
+                      <a:tailEnd type="none" w="med" len="med"/>
+                    </a:lnL>
+                    <a:lnR w="12700" cap="flat" cmpd="sng" algn="ctr">
+                      <a:solidFill>
+                        <a:srgbClr val="E2E4F0"/>
+                      </a:solidFill>
+                      <a:prstDash val="solid"/>
+                      <a:round/>
+                      <a:headEnd type="none" w="med" len="med"/>
+                      <a:tailEnd type="none" w="med" len="med"/>
+                    </a:lnR>
+                    <a:lnT w="12700" cap="flat" cmpd="sng" algn="ctr">
+                      <a:solidFill>
+                        <a:srgbClr val="E2E4F0"/>
+                      </a:solidFill>
+                      <a:prstDash val="solid"/>
+                      <a:round/>
+                      <a:headEnd type="none" w="med" len="med"/>
+                      <a:tailEnd type="none" w="med" len="med"/>
+                    </a:lnT>
+                    <a:lnB w="12700" cap="flat" cmpd="sng" algn="ctr">
+                      <a:solidFill>
+                        <a:srgbClr val="E2E4F0"/>
+                      </a:solidFill>
+                      <a:prstDash val="solid"/>
+                      <a:round/>
+                      <a:headEnd type="none" w="med" len="med"/>
+                      <a:tailEnd type="none" w="med" len="med"/>
+                    </a:lnB>
+                    <a:solidFill>
+                      <a:schemeClr val="tx2"/>
+                    </a:solidFill>
+                  </a:tcPr>
+                </a:tc>
+                <a:tc>
+                  <a:txBody>
+                    <a:bodyPr/>
+                    <a:lstStyle/>
+                    <a:p>
+                      <a:pPr algn="ctr" indent="0" marL="0">
+                        <a:buNone/>
+                      </a:pPr>
+                      <a:r>
+                        <a:rPr lang="en-US" sz="1500" b="1" dirty="0">
+                          <a:solidFill>
+                            <a:schemeClr val="bg1"/>
+                          </a:solidFill>
+                          <a:latin typeface="Calibri" pitchFamily="34" charset="0"/>
+                          <a:ea typeface="Calibri" pitchFamily="34" charset="-122"/>
+                          <a:cs typeface="Calibri" pitchFamily="34" charset="-120"/>
+                        </a:rPr>
+                        <a:t>Cloud AI chatbots</a:t>
+                      </a:r>
+                      <a:endParaRPr lang="en-US" sz="1500" dirty="0">
+                        <a:latin typeface="Calibri" charset="0"/>
+                        <a:ea typeface="Calibri" charset="0"/>
+                        <a:cs typeface="Calibri" charset="0"/>
+                      </a:endParaRPr>
+                    </a:p>
+                  </a:txBody>
+                  <a:tcPr marL="128016" marR="128016" marT="36576" marB="36576" anchor="ctr">
+                    <a:lnL w="12700" cap="flat" cmpd="sng" algn="ctr">
+                      <a:solidFill>
+                        <a:srgbClr val="E2E4F0"/>
+                      </a:solidFill>
+                      <a:prstDash val="solid"/>
+                      <a:round/>
+                      <a:headEnd type="none" w="med" len="med"/>
+                      <a:tailEnd type="none" w="med" len="med"/>
+                    </a:lnL>
+                    <a:lnR w="12700" cap="flat" cmpd="sng" algn="ctr">
+                      <a:solidFill>
+                        <a:srgbClr val="E2E4F0"/>
+                      </a:solidFill>
+                      <a:prstDash val="solid"/>
+                      <a:round/>
+                      <a:headEnd type="none" w="med" len="med"/>
+                      <a:tailEnd type="none" w="med" len="med"/>
+                    </a:lnR>
+                    <a:lnT w="12700" cap="flat" cmpd="sng" algn="ctr">
+                      <a:solidFill>
+                        <a:srgbClr val="E2E4F0"/>
+                      </a:solidFill>
+                      <a:prstDash val="solid"/>
+                      <a:round/>
+                      <a:headEnd type="none" w="med" len="med"/>
+                      <a:tailEnd type="none" w="med" len="med"/>
+                    </a:lnT>
+                    <a:lnB w="12700" cap="flat" cmpd="sng" algn="ctr">
+                      <a:solidFill>
+                        <a:srgbClr val="E2E4F0"/>
+                      </a:solidFill>
+                      <a:prstDash val="solid"/>
+                      <a:round/>
+                      <a:headEnd type="none" w="med" len="med"/>
+                      <a:tailEnd type="none" w="med" len="med"/>
+                    </a:lnB>
+                    <a:solidFill>
+                      <a:schemeClr val="tx2"/>
+                    </a:solidFill>
+                  </a:tcPr>
+                </a:tc>
+                <a:tc>
+                  <a:txBody>
+                    <a:bodyPr/>
+                    <a:lstStyle/>
+                    <a:p>
+                      <a:pPr algn="ctr" indent="0" marL="0">
+                        <a:buNone/>
+                      </a:pPr>
+                      <a:r>
+                        <a:rPr lang="en-US" sz="1500" b="1" dirty="0">
+                          <a:solidFill>
+                            <a:schemeClr val="bg1"/>
+                          </a:solidFill>
+                          <a:latin typeface="Calibri" pitchFamily="34" charset="0"/>
+                          <a:ea typeface="Calibri" pitchFamily="34" charset="-122"/>
+                          <a:cs typeface="Calibri" pitchFamily="34" charset="-120"/>
+                        </a:rPr>
+                        <a:t>StudyPilot</a:t>
+                      </a:r>
+                      <a:endParaRPr lang="en-US" sz="1500" dirty="0">
+                        <a:latin typeface="Calibri" charset="0"/>
+                        <a:ea typeface="Calibri" charset="0"/>
+                        <a:cs typeface="Calibri" charset="0"/>
+                      </a:endParaRPr>
+                    </a:p>
+                  </a:txBody>
+                  <a:tcPr marL="128016" marR="128016" marT="36576" marB="36576" anchor="ctr">
+                    <a:lnL w="12700" cap="flat" cmpd="sng" algn="ctr">
+                      <a:solidFill>
+                        <a:srgbClr val="E2E4F0"/>
+                      </a:solidFill>
+                      <a:prstDash val="solid"/>
+                      <a:round/>
+                      <a:headEnd type="none" w="med" len="med"/>
+                      <a:tailEnd type="none" w="med" len="med"/>
+                    </a:lnL>
+                    <a:lnR w="12700" cap="flat" cmpd="sng" algn="ctr">
+                      <a:solidFill>
+                        <a:srgbClr val="E2E4F0"/>
+                      </a:solidFill>
+                      <a:prstDash val="solid"/>
+                      <a:round/>
+                      <a:headEnd type="none" w="med" len="med"/>
+                      <a:tailEnd type="none" w="med" len="med"/>
+                    </a:lnR>
+                    <a:lnT w="12700" cap="flat" cmpd="sng" algn="ctr">
+                      <a:solidFill>
+                        <a:srgbClr val="E2E4F0"/>
+                      </a:solidFill>
+                      <a:prstDash val="solid"/>
+                      <a:round/>
+                      <a:headEnd type="none" w="med" len="med"/>
+                      <a:tailEnd type="none" w="med" len="med"/>
+                    </a:lnT>
+                    <a:lnB w="12700" cap="flat" cmpd="sng" algn="ctr">
+                      <a:solidFill>
+                        <a:srgbClr val="E2E4F0"/>
+                      </a:solidFill>
+                      <a:prstDash val="solid"/>
+                      <a:round/>
+                      <a:headEnd type="none" w="med" len="med"/>
+                      <a:tailEnd type="none" w="med" len="med"/>
+                    </a:lnB>
+                    <a:solidFill>
+                      <a:schemeClr val="accent1"/>
+                    </a:solidFill>
+                  </a:tcPr>
+                </a:tc>
+              </a:tr>
+              <a:tr h="713232">
+                <a:tc>
+                  <a:txBody>
+                    <a:bodyPr/>
+                    <a:lstStyle/>
+                    <a:p>
+                      <a:pPr indent="0" marL="0">
+                        <a:buNone/>
+                      </a:pPr>
+                      <a:r>
+                        <a:rPr lang="en-US" sz="1500" b="1" dirty="0">
+                          <a:solidFill>
+                            <a:schemeClr val="tx1"/>
+                          </a:solidFill>
+                          <a:latin typeface="Calibri" pitchFamily="34" charset="0"/>
+                          <a:ea typeface="Calibri" pitchFamily="34" charset="-122"/>
+                          <a:cs typeface="Calibri" pitchFamily="34" charset="-120"/>
+                        </a:rPr>
+                        <a:t>Works offline, notes stay local</a:t>
+                      </a:r>
+                      <a:endParaRPr lang="en-US" sz="1500" dirty="0">
+                        <a:latin typeface="Calibri" charset="0"/>
+                        <a:ea typeface="Calibri" charset="0"/>
+                        <a:cs typeface="Calibri" charset="0"/>
+                      </a:endParaRPr>
+                    </a:p>
+                  </a:txBody>
+                  <a:tcPr marL="128016" marR="128016" marT="36576" marB="36576" anchor="ctr">
+                    <a:lnL w="12700" cap="flat" cmpd="sng" algn="ctr">
+                      <a:solidFill>
+                        <a:srgbClr val="E2E4F0"/>
+                      </a:solidFill>
+                      <a:prstDash val="solid"/>
+                      <a:round/>
+                      <a:headEnd type="none" w="med" len="med"/>
+                      <a:tailEnd type="none" w="med" len="med"/>
+                    </a:lnL>
+                    <a:lnR w="12700" cap="flat" cmpd="sng" algn="ctr">
+                      <a:solidFill>
+                        <a:srgbClr val="E2E4F0"/>
+                      </a:solidFill>
+                      <a:prstDash val="solid"/>
+                      <a:round/>
+                      <a:headEnd type="none" w="med" len="med"/>
+                      <a:tailEnd type="none" w="med" len="med"/>
+                    </a:lnR>
+                    <a:lnT w="12700" cap="flat" cmpd="sng" algn="ctr">
+                      <a:solidFill>
+                        <a:srgbClr val="E2E4F0"/>
+                      </a:solidFill>
+                      <a:prstDash val="solid"/>
+                      <a:round/>
+                      <a:headEnd type="none" w="med" len="med"/>
+                      <a:tailEnd type="none" w="med" len="med"/>
+                    </a:lnT>
+                    <a:lnB w="12700" cap="flat" cmpd="sng" algn="ctr">
+                      <a:solidFill>
+                        <a:srgbClr val="E2E4F0"/>
+                      </a:solidFill>
+                      <a:prstDash val="solid"/>
+                      <a:round/>
+                      <a:headEnd type="none" w="med" len="med"/>
+                      <a:tailEnd type="none" w="med" len="med"/>
+                    </a:lnB>
+                    <a:solidFill>
+                      <a:schemeClr val="bg2"/>
+                    </a:solidFill>
+                  </a:tcPr>
+                </a:tc>
+                <a:tc>
+                  <a:txBody>
+                    <a:bodyPr/>
+                    <a:lstStyle/>
+                    <a:p>
+                      <a:pPr algn="ctr" indent="0" marL="0">
+                        <a:buNone/>
+                      </a:pPr>
+                      <a:r>
+                        <a:rPr lang="en-US" sz="1500" dirty="0">
+                          <a:solidFill>
+                            <a:srgbClr val="2E7D32"/>
+                          </a:solidFill>
+                          <a:latin typeface="Calibri" pitchFamily="34" charset="0"/>
+                          <a:ea typeface="Calibri" pitchFamily="34" charset="-122"/>
+                          <a:cs typeface="Calibri" pitchFamily="34" charset="-120"/>
+                        </a:rPr>
+                        <a:t>✓  Yes</a:t>
+                      </a:r>
+                      <a:endParaRPr lang="en-US" sz="1500" dirty="0">
+                        <a:latin typeface="Calibri" charset="0"/>
+                        <a:ea typeface="Calibri" charset="0"/>
+                        <a:cs typeface="Calibri" charset="0"/>
+                      </a:endParaRPr>
+                    </a:p>
+                  </a:txBody>
+                  <a:tcPr marL="128016" marR="128016" marT="36576" marB="36576" anchor="ctr">
+                    <a:lnL w="12700" cap="flat" cmpd="sng" algn="ctr">
+                      <a:solidFill>
+                        <a:srgbClr val="E2E4F0"/>
+                      </a:solidFill>
+                      <a:prstDash val="solid"/>
+                      <a:round/>
+                      <a:headEnd type="none" w="med" len="med"/>
+                      <a:tailEnd type="none" w="med" len="med"/>
+                    </a:lnL>
+                    <a:lnR w="12700" cap="flat" cmpd="sng" algn="ctr">
+                      <a:solidFill>
+                        <a:srgbClr val="E2E4F0"/>
+                      </a:solidFill>
+                      <a:prstDash val="solid"/>
+                      <a:round/>
+                      <a:headEnd type="none" w="med" len="med"/>
+                      <a:tailEnd type="none" w="med" len="med"/>
+                    </a:lnR>
+                    <a:lnT w="12700" cap="flat" cmpd="sng" algn="ctr">
+                      <a:solidFill>
+                        <a:srgbClr val="E2E4F0"/>
+                      </a:solidFill>
+                      <a:prstDash val="solid"/>
+                      <a:round/>
+                      <a:headEnd type="none" w="med" len="med"/>
+                      <a:tailEnd type="none" w="med" len="med"/>
+                    </a:lnT>
+                    <a:lnB w="12700" cap="flat" cmpd="sng" algn="ctr">
+                      <a:solidFill>
+                        <a:srgbClr val="E2E4F0"/>
+                      </a:solidFill>
+                      <a:prstDash val="solid"/>
+                      <a:round/>
+                      <a:headEnd type="none" w="med" len="med"/>
+                      <a:tailEnd type="none" w="med" len="med"/>
+                    </a:lnB>
+                    <a:solidFill>
+                      <a:schemeClr val="bg1"/>
+                    </a:solidFill>
+                  </a:tcPr>
+                </a:tc>
+                <a:tc>
+                  <a:txBody>
+                    <a:bodyPr/>
+                    <a:lstStyle/>
+                    <a:p>
+                      <a:pPr algn="ctr" indent="0" marL="0">
+                        <a:buNone/>
+                      </a:pPr>
+                      <a:r>
+                        <a:rPr lang="en-US" sz="1500" dirty="0">
+                          <a:solidFill>
+                            <a:srgbClr val="9AA0AE"/>
+                          </a:solidFill>
+                          <a:latin typeface="Calibri" pitchFamily="34" charset="0"/>
+                          <a:ea typeface="Calibri" pitchFamily="34" charset="-122"/>
+                          <a:cs typeface="Calibri" pitchFamily="34" charset="-120"/>
+                        </a:rPr>
+                        <a:t>✗  No</a:t>
+                      </a:r>
+                      <a:endParaRPr lang="en-US" sz="1500" dirty="0">
+                        <a:latin typeface="Calibri" charset="0"/>
+                        <a:ea typeface="Calibri" charset="0"/>
+                        <a:cs typeface="Calibri" charset="0"/>
+                      </a:endParaRPr>
+                    </a:p>
+                  </a:txBody>
+                  <a:tcPr marL="128016" marR="128016" marT="36576" marB="36576" anchor="ctr">
+                    <a:lnL w="12700" cap="flat" cmpd="sng" algn="ctr">
+                      <a:solidFill>
+                        <a:srgbClr val="E2E4F0"/>
+                      </a:solidFill>
+                      <a:prstDash val="solid"/>
+                      <a:round/>
+                      <a:headEnd type="none" w="med" len="med"/>
+                      <a:tailEnd type="none" w="med" len="med"/>
+                    </a:lnL>
+                    <a:lnR w="12700" cap="flat" cmpd="sng" algn="ctr">
+                      <a:solidFill>
+                        <a:srgbClr val="E2E4F0"/>
+                      </a:solidFill>
+                      <a:prstDash val="solid"/>
+                      <a:round/>
+                      <a:headEnd type="none" w="med" len="med"/>
+                      <a:tailEnd type="none" w="med" len="med"/>
+                    </a:lnR>
+                    <a:lnT w="12700" cap="flat" cmpd="sng" algn="ctr">
+                      <a:solidFill>
+                        <a:srgbClr val="E2E4F0"/>
+                      </a:solidFill>
+                      <a:prstDash val="solid"/>
+                      <a:round/>
+                      <a:headEnd type="none" w="med" len="med"/>
+                      <a:tailEnd type="none" w="med" len="med"/>
+                    </a:lnT>
+                    <a:lnB w="12700" cap="flat" cmpd="sng" algn="ctr">
+                      <a:solidFill>
+                        <a:srgbClr val="E2E4F0"/>
+                      </a:solidFill>
+                      <a:prstDash val="solid"/>
+                      <a:round/>
+                      <a:headEnd type="none" w="med" len="med"/>
+                      <a:tailEnd type="none" w="med" len="med"/>
+                    </a:lnB>
+                    <a:solidFill>
+                      <a:schemeClr val="bg1"/>
+                    </a:solidFill>
+                  </a:tcPr>
+                </a:tc>
+                <a:tc>
+                  <a:txBody>
+                    <a:bodyPr/>
+                    <a:lstStyle/>
+                    <a:p>
+                      <a:pPr algn="ctr" indent="0" marL="0">
+                        <a:buNone/>
+                      </a:pPr>
+                      <a:r>
+                        <a:rPr lang="en-US" sz="1500" b="1" dirty="0">
+                          <a:solidFill>
+                            <a:srgbClr val="2E7D32"/>
+                          </a:solidFill>
+                          <a:latin typeface="Calibri" pitchFamily="34" charset="0"/>
+                          <a:ea typeface="Calibri" pitchFamily="34" charset="-122"/>
+                          <a:cs typeface="Calibri" pitchFamily="34" charset="-120"/>
+                        </a:rPr>
+                        <a:t>✓  Yes</a:t>
+                      </a:r>
+                      <a:endParaRPr lang="en-US" sz="1500" dirty="0">
+                        <a:latin typeface="Calibri" charset="0"/>
+                        <a:ea typeface="Calibri" charset="0"/>
+                        <a:cs typeface="Calibri" charset="0"/>
+                      </a:endParaRPr>
+                    </a:p>
+                  </a:txBody>
+                  <a:tcPr marL="128016" marR="128016" marT="36576" marB="36576" anchor="ctr">
+                    <a:lnL w="12700" cap="flat" cmpd="sng" algn="ctr">
+                      <a:solidFill>
+                        <a:srgbClr val="E2E4F0"/>
+                      </a:solidFill>
+                      <a:prstDash val="solid"/>
+                      <a:round/>
+                      <a:headEnd type="none" w="med" len="med"/>
+                      <a:tailEnd type="none" w="med" len="med"/>
+                    </a:lnL>
+                    <a:lnR w="12700" cap="flat" cmpd="sng" algn="ctr">
+                      <a:solidFill>
+                        <a:srgbClr val="E2E4F0"/>
+                      </a:solidFill>
+                      <a:prstDash val="solid"/>
+                      <a:round/>
+                      <a:headEnd type="none" w="med" len="med"/>
+                      <a:tailEnd type="none" w="med" len="med"/>
+                    </a:lnR>
+                    <a:lnT w="12700" cap="flat" cmpd="sng" algn="ctr">
+                      <a:solidFill>
+                        <a:srgbClr val="E2E4F0"/>
+                      </a:solidFill>
+                      <a:prstDash val="solid"/>
+                      <a:round/>
+                      <a:headEnd type="none" w="med" len="med"/>
+                      <a:tailEnd type="none" w="med" len="med"/>
+                    </a:lnT>
+                    <a:lnB w="12700" cap="flat" cmpd="sng" algn="ctr">
+                      <a:solidFill>
+                        <a:srgbClr val="E2E4F0"/>
+                      </a:solidFill>
+                      <a:prstDash val="solid"/>
+                      <a:round/>
+                      <a:headEnd type="none" w="med" len="med"/>
+                      <a:tailEnd type="none" w="med" len="med"/>
+                    </a:lnB>
+                    <a:solidFill>
+                      <a:schemeClr val="accent2"/>
+                    </a:solidFill>
+                  </a:tcPr>
+                </a:tc>
+              </a:tr>
+              <a:tr h="713232">
+                <a:tc>
+                  <a:txBody>
+                    <a:bodyPr/>
+                    <a:lstStyle/>
+                    <a:p>
+                      <a:pPr indent="0" marL="0">
+                        <a:buNone/>
+                      </a:pPr>
+                      <a:r>
+                        <a:rPr lang="en-US" sz="1500" b="1" dirty="0">
+                          <a:solidFill>
+                            <a:schemeClr val="tx1"/>
+                          </a:solidFill>
+                          <a:latin typeface="Calibri" pitchFamily="34" charset="0"/>
+                          <a:ea typeface="Calibri" pitchFamily="34" charset="-122"/>
+                          <a:cs typeface="Calibri" pitchFamily="34" charset="-120"/>
+                        </a:rPr>
+                        <a:t>Answers only from your notes</a:t>
+                      </a:r>
+                      <a:endParaRPr lang="en-US" sz="1500" dirty="0">
+                        <a:latin typeface="Calibri" charset="0"/>
+                        <a:ea typeface="Calibri" charset="0"/>
+                        <a:cs typeface="Calibri" charset="0"/>
+                      </a:endParaRPr>
+                    </a:p>
+                  </a:txBody>
+                  <a:tcPr marL="128016" marR="128016" marT="36576" marB="36576" anchor="ctr">
+                    <a:lnL w="12700" cap="flat" cmpd="sng" algn="ctr">
+                      <a:solidFill>
+                        <a:srgbClr val="E2E4F0"/>
+                      </a:solidFill>
+                      <a:prstDash val="solid"/>
+                      <a:round/>
+                      <a:headEnd type="none" w="med" len="med"/>
+                      <a:tailEnd type="none" w="med" len="med"/>
+                    </a:lnL>
+                    <a:lnR w="12700" cap="flat" cmpd="sng" algn="ctr">
+                      <a:solidFill>
+                        <a:srgbClr val="E2E4F0"/>
+                      </a:solidFill>
+                      <a:prstDash val="solid"/>
+                      <a:round/>
+                      <a:headEnd type="none" w="med" len="med"/>
+                      <a:tailEnd type="none" w="med" len="med"/>
+                    </a:lnR>
+                    <a:lnT w="12700" cap="flat" cmpd="sng" algn="ctr">
+                      <a:solidFill>
+                        <a:srgbClr val="E2E4F0"/>
+                      </a:solidFill>
+                      <a:prstDash val="solid"/>
+                      <a:round/>
+                      <a:headEnd type="none" w="med" len="med"/>
+                      <a:tailEnd type="none" w="med" len="med"/>
+                    </a:lnT>
+                    <a:lnB w="12700" cap="flat" cmpd="sng" algn="ctr">
+                      <a:solidFill>
+                        <a:srgbClr val="E2E4F0"/>
+                      </a:solidFill>
+                      <a:prstDash val="solid"/>
+                      <a:round/>
+                      <a:headEnd type="none" w="med" len="med"/>
+                      <a:tailEnd type="none" w="med" len="med"/>
+                    </a:lnB>
+                    <a:solidFill>
+                      <a:schemeClr val="bg2"/>
+                    </a:solidFill>
+                  </a:tcPr>
+                </a:tc>
+                <a:tc>
+                  <a:txBody>
+                    <a:bodyPr/>
+                    <a:lstStyle/>
+                    <a:p>
+                      <a:pPr algn="ctr" indent="0" marL="0">
+                        <a:buNone/>
+                      </a:pPr>
+                      <a:r>
+                        <a:rPr lang="en-US" sz="1500" dirty="0">
+                          <a:solidFill>
+                            <a:srgbClr val="2E7D32"/>
+                          </a:solidFill>
+                          <a:latin typeface="Calibri" pitchFamily="34" charset="0"/>
+                          <a:ea typeface="Calibri" pitchFamily="34" charset="-122"/>
+                          <a:cs typeface="Calibri" pitchFamily="34" charset="-120"/>
+                        </a:rPr>
+                        <a:t>✓  Yes</a:t>
+                      </a:r>
+                      <a:endParaRPr lang="en-US" sz="1500" dirty="0">
+                        <a:latin typeface="Calibri" charset="0"/>
+                        <a:ea typeface="Calibri" charset="0"/>
+                        <a:cs typeface="Calibri" charset="0"/>
+                      </a:endParaRPr>
+                    </a:p>
+                  </a:txBody>
+                  <a:tcPr marL="128016" marR="128016" marT="36576" marB="36576" anchor="ctr">
+                    <a:lnL w="12700" cap="flat" cmpd="sng" algn="ctr">
+                      <a:solidFill>
+                        <a:srgbClr val="E2E4F0"/>
+                      </a:solidFill>
+                      <a:prstDash val="solid"/>
+                      <a:round/>
+                      <a:headEnd type="none" w="med" len="med"/>
+                      <a:tailEnd type="none" w="med" len="med"/>
+                    </a:lnL>
+                    <a:lnR w="12700" cap="flat" cmpd="sng" algn="ctr">
+                      <a:solidFill>
+                        <a:srgbClr val="E2E4F0"/>
+                      </a:solidFill>
+                      <a:prstDash val="solid"/>
+                      <a:round/>
+                      <a:headEnd type="none" w="med" len="med"/>
+                      <a:tailEnd type="none" w="med" len="med"/>
+                    </a:lnR>
+                    <a:lnT w="12700" cap="flat" cmpd="sng" algn="ctr">
+                      <a:solidFill>
+                        <a:srgbClr val="E2E4F0"/>
+                      </a:solidFill>
+                      <a:prstDash val="solid"/>
+                      <a:round/>
+                      <a:headEnd type="none" w="med" len="med"/>
+                      <a:tailEnd type="none" w="med" len="med"/>
+                    </a:lnT>
+                    <a:lnB w="12700" cap="flat" cmpd="sng" algn="ctr">
+                      <a:solidFill>
+                        <a:srgbClr val="E2E4F0"/>
+                      </a:solidFill>
+                      <a:prstDash val="solid"/>
+                      <a:round/>
+                      <a:headEnd type="none" w="med" len="med"/>
+                      <a:tailEnd type="none" w="med" len="med"/>
+                    </a:lnB>
+                    <a:solidFill>
+                      <a:schemeClr val="bg1"/>
+                    </a:solidFill>
+                  </a:tcPr>
+                </a:tc>
+                <a:tc>
+                  <a:txBody>
+                    <a:bodyPr/>
+                    <a:lstStyle/>
+                    <a:p>
+                      <a:pPr algn="ctr" indent="0" marL="0">
+                        <a:buNone/>
+                      </a:pPr>
+                      <a:r>
+                        <a:rPr lang="en-US" sz="1500" dirty="0">
+                          <a:solidFill>
+                            <a:srgbClr val="B26A00"/>
+                          </a:solidFill>
+                          <a:latin typeface="Calibri" pitchFamily="34" charset="0"/>
+                          <a:ea typeface="Calibri" pitchFamily="34" charset="-122"/>
+                          <a:cs typeface="Calibri" pitchFamily="34" charset="-120"/>
+                        </a:rPr>
+                        <a:t>◐  Partial</a:t>
+                      </a:r>
+                      <a:endParaRPr lang="en-US" sz="1500" dirty="0">
+                        <a:latin typeface="Calibri" charset="0"/>
+                        <a:ea typeface="Calibri" charset="0"/>
+                        <a:cs typeface="Calibri" charset="0"/>
+                      </a:endParaRPr>
+                    </a:p>
+                  </a:txBody>
+                  <a:tcPr marL="128016" marR="128016" marT="36576" marB="36576" anchor="ctr">
+                    <a:lnL w="12700" cap="flat" cmpd="sng" algn="ctr">
+                      <a:solidFill>
+                        <a:srgbClr val="E2E4F0"/>
+                      </a:solidFill>
+                      <a:prstDash val="solid"/>
+                      <a:round/>
+                      <a:headEnd type="none" w="med" len="med"/>
+                      <a:tailEnd type="none" w="med" len="med"/>
+                    </a:lnL>
+                    <a:lnR w="12700" cap="flat" cmpd="sng" algn="ctr">
+                      <a:solidFill>
+                        <a:srgbClr val="E2E4F0"/>
+                      </a:solidFill>
+                      <a:prstDash val="solid"/>
+                      <a:round/>
+                      <a:headEnd type="none" w="med" len="med"/>
+                      <a:tailEnd type="none" w="med" len="med"/>
+                    </a:lnR>
+                    <a:lnT w="12700" cap="flat" cmpd="sng" algn="ctr">
+                      <a:solidFill>
+                        <a:srgbClr val="E2E4F0"/>
+                      </a:solidFill>
+                      <a:prstDash val="solid"/>
+                      <a:round/>
+                      <a:headEnd type="none" w="med" len="med"/>
+                      <a:tailEnd type="none" w="med" len="med"/>
+                    </a:lnT>
+                    <a:lnB w="12700" cap="flat" cmpd="sng" algn="ctr">
+                      <a:solidFill>
+                        <a:srgbClr val="E2E4F0"/>
+                      </a:solidFill>
+                      <a:prstDash val="solid"/>
+                      <a:round/>
+                      <a:headEnd type="none" w="med" len="med"/>
+                      <a:tailEnd type="none" w="med" len="med"/>
+                    </a:lnB>
+                    <a:solidFill>
+                      <a:schemeClr val="bg1"/>
+                    </a:solidFill>
+                  </a:tcPr>
+                </a:tc>
+                <a:tc>
+                  <a:txBody>
+                    <a:bodyPr/>
+                    <a:lstStyle/>
+                    <a:p>
+                      <a:pPr algn="ctr" indent="0" marL="0">
+                        <a:buNone/>
+                      </a:pPr>
+                      <a:r>
+                        <a:rPr lang="en-US" sz="1500" b="1" dirty="0">
+                          <a:solidFill>
+                            <a:srgbClr val="2E7D32"/>
+                          </a:solidFill>
+                          <a:latin typeface="Calibri" pitchFamily="34" charset="0"/>
+                          <a:ea typeface="Calibri" pitchFamily="34" charset="-122"/>
+                          <a:cs typeface="Calibri" pitchFamily="34" charset="-120"/>
+                        </a:rPr>
+                        <a:t>✓  Yes (extractive)</a:t>
+                      </a:r>
+                      <a:endParaRPr lang="en-US" sz="1500" dirty="0">
+                        <a:latin typeface="Calibri" charset="0"/>
+                        <a:ea typeface="Calibri" charset="0"/>
+                        <a:cs typeface="Calibri" charset="0"/>
+                      </a:endParaRPr>
+                    </a:p>
+                  </a:txBody>
+                  <a:tcPr marL="128016" marR="128016" marT="36576" marB="36576" anchor="ctr">
+                    <a:lnL w="12700" cap="flat" cmpd="sng" algn="ctr">
+                      <a:solidFill>
+                        <a:srgbClr val="E2E4F0"/>
+                      </a:solidFill>
+                      <a:prstDash val="solid"/>
+                      <a:round/>
+                      <a:headEnd type="none" w="med" len="med"/>
+                      <a:tailEnd type="none" w="med" len="med"/>
+                    </a:lnL>
+                    <a:lnR w="12700" cap="flat" cmpd="sng" algn="ctr">
+                      <a:solidFill>
+                        <a:srgbClr val="E2E4F0"/>
+                      </a:solidFill>
+                      <a:prstDash val="solid"/>
+                      <a:round/>
+                      <a:headEnd type="none" w="med" len="med"/>
+                      <a:tailEnd type="none" w="med" len="med"/>
+                    </a:lnR>
+                    <a:lnT w="12700" cap="flat" cmpd="sng" algn="ctr">
+                      <a:solidFill>
+                        <a:srgbClr val="E2E4F0"/>
+                      </a:solidFill>
+                      <a:prstDash val="solid"/>
+                      <a:round/>
+                      <a:headEnd type="none" w="med" len="med"/>
+                      <a:tailEnd type="none" w="med" len="med"/>
+                    </a:lnT>
+                    <a:lnB w="12700" cap="flat" cmpd="sng" algn="ctr">
+                      <a:solidFill>
+                        <a:srgbClr val="E2E4F0"/>
+                      </a:solidFill>
+                      <a:prstDash val="solid"/>
+                      <a:round/>
+                      <a:headEnd type="none" w="med" len="med"/>
+                      <a:tailEnd type="none" w="med" len="med"/>
+                    </a:lnB>
+                    <a:solidFill>
+                      <a:schemeClr val="accent2"/>
+                    </a:solidFill>
+                  </a:tcPr>
+                </a:tc>
+              </a:tr>
+              <a:tr h="713232">
+                <a:tc>
+                  <a:txBody>
+                    <a:bodyPr/>
+                    <a:lstStyle/>
+                    <a:p>
+                      <a:pPr indent="0" marL="0">
+                        <a:buNone/>
+                      </a:pPr>
+                      <a:r>
+                        <a:rPr lang="en-US" sz="1500" b="1" dirty="0">
+                          <a:solidFill>
+                            <a:schemeClr val="tx1"/>
+                          </a:solidFill>
+                          <a:latin typeface="Calibri" pitchFamily="34" charset="0"/>
+                          <a:ea typeface="Calibri" pitchFamily="34" charset="-122"/>
+                          <a:cs typeface="Calibri" pitchFamily="34" charset="-120"/>
+                        </a:rPr>
+                        <a:t>Shows why (scores, evidence)</a:t>
+                      </a:r>
+                      <a:endParaRPr lang="en-US" sz="1500" dirty="0">
+                        <a:latin typeface="Calibri" charset="0"/>
+                        <a:ea typeface="Calibri" charset="0"/>
+                        <a:cs typeface="Calibri" charset="0"/>
+                      </a:endParaRPr>
+                    </a:p>
+                  </a:txBody>
+                  <a:tcPr marL="128016" marR="128016" marT="36576" marB="36576" anchor="ctr">
+                    <a:lnL w="12700" cap="flat" cmpd="sng" algn="ctr">
+                      <a:solidFill>
+                        <a:srgbClr val="E2E4F0"/>
+                      </a:solidFill>
+                      <a:prstDash val="solid"/>
+                      <a:round/>
+                      <a:headEnd type="none" w="med" len="med"/>
+                      <a:tailEnd type="none" w="med" len="med"/>
+                    </a:lnL>
+                    <a:lnR w="12700" cap="flat" cmpd="sng" algn="ctr">
+                      <a:solidFill>
+                        <a:srgbClr val="E2E4F0"/>
+                      </a:solidFill>
+                      <a:prstDash val="solid"/>
+                      <a:round/>
+                      <a:headEnd type="none" w="med" len="med"/>
+                      <a:tailEnd type="none" w="med" len="med"/>
+                    </a:lnR>
+                    <a:lnT w="12700" cap="flat" cmpd="sng" algn="ctr">
+                      <a:solidFill>
+                        <a:srgbClr val="E2E4F0"/>
+                      </a:solidFill>
+                      <a:prstDash val="solid"/>
+                      <a:round/>
+                      <a:headEnd type="none" w="med" len="med"/>
+                      <a:tailEnd type="none" w="med" len="med"/>
+                    </a:lnT>
+                    <a:lnB w="12700" cap="flat" cmpd="sng" algn="ctr">
+                      <a:solidFill>
+                        <a:srgbClr val="E2E4F0"/>
+                      </a:solidFill>
+                      <a:prstDash val="solid"/>
+                      <a:round/>
+                      <a:headEnd type="none" w="med" len="med"/>
+                      <a:tailEnd type="none" w="med" len="med"/>
+                    </a:lnB>
+                    <a:solidFill>
+                      <a:schemeClr val="bg2"/>
+                    </a:solidFill>
+                  </a:tcPr>
+                </a:tc>
+                <a:tc>
+                  <a:txBody>
+                    <a:bodyPr/>
+                    <a:lstStyle/>
+                    <a:p>
+                      <a:pPr algn="ctr" indent="0" marL="0">
+                        <a:buNone/>
+                      </a:pPr>
+                      <a:r>
+                        <a:rPr lang="en-US" sz="1500" dirty="0">
+                          <a:solidFill>
+                            <a:srgbClr val="9AA0AE"/>
+                          </a:solidFill>
+                          <a:latin typeface="Calibri" pitchFamily="34" charset="0"/>
+                          <a:ea typeface="Calibri" pitchFamily="34" charset="-122"/>
+                          <a:cs typeface="Calibri" pitchFamily="34" charset="-120"/>
+                        </a:rPr>
+                        <a:t>✗  No</a:t>
+                      </a:r>
+                      <a:endParaRPr lang="en-US" sz="1500" dirty="0">
+                        <a:latin typeface="Calibri" charset="0"/>
+                        <a:ea typeface="Calibri" charset="0"/>
+                        <a:cs typeface="Calibri" charset="0"/>
+                      </a:endParaRPr>
+                    </a:p>
+                  </a:txBody>
+                  <a:tcPr marL="128016" marR="128016" marT="36576" marB="36576" anchor="ctr">
+                    <a:lnL w="12700" cap="flat" cmpd="sng" algn="ctr">
+                      <a:solidFill>
+                        <a:srgbClr val="E2E4F0"/>
+                      </a:solidFill>
+                      <a:prstDash val="solid"/>
+                      <a:round/>
+                      <a:headEnd type="none" w="med" len="med"/>
+                      <a:tailEnd type="none" w="med" len="med"/>
+                    </a:lnL>
+                    <a:lnR w="12700" cap="flat" cmpd="sng" algn="ctr">
+                      <a:solidFill>
+                        <a:srgbClr val="E2E4F0"/>
+                      </a:solidFill>
+                      <a:prstDash val="solid"/>
+                      <a:round/>
+                      <a:headEnd type="none" w="med" len="med"/>
+                      <a:tailEnd type="none" w="med" len="med"/>
+                    </a:lnR>
+                    <a:lnT w="12700" cap="flat" cmpd="sng" algn="ctr">
+                      <a:solidFill>
+                        <a:srgbClr val="E2E4F0"/>
+                      </a:solidFill>
+                      <a:prstDash val="solid"/>
+                      <a:round/>
+                      <a:headEnd type="none" w="med" len="med"/>
+                      <a:tailEnd type="none" w="med" len="med"/>
+                    </a:lnT>
+                    <a:lnB w="12700" cap="flat" cmpd="sng" algn="ctr">
+                      <a:solidFill>
+                        <a:srgbClr val="E2E4F0"/>
+                      </a:solidFill>
+                      <a:prstDash val="solid"/>
+                      <a:round/>
+                      <a:headEnd type="none" w="med" len="med"/>
+                      <a:tailEnd type="none" w="med" len="med"/>
+                    </a:lnB>
+                    <a:solidFill>
+                      <a:schemeClr val="bg1"/>
+                    </a:solidFill>
+                  </a:tcPr>
+                </a:tc>
+                <a:tc>
+                  <a:txBody>
+                    <a:bodyPr/>
+                    <a:lstStyle/>
+                    <a:p>
+                      <a:pPr algn="ctr" indent="0" marL="0">
+                        <a:buNone/>
+                      </a:pPr>
+                      <a:r>
+                        <a:rPr lang="en-US" sz="1500" dirty="0">
+                          <a:solidFill>
+                            <a:srgbClr val="B26A00"/>
+                          </a:solidFill>
+                          <a:latin typeface="Calibri" pitchFamily="34" charset="0"/>
+                          <a:ea typeface="Calibri" pitchFamily="34" charset="-122"/>
+                          <a:cs typeface="Calibri" pitchFamily="34" charset="-120"/>
+                        </a:rPr>
+                        <a:t>◐  Partial</a:t>
+                      </a:r>
+                      <a:endParaRPr lang="en-US" sz="1500" dirty="0">
+                        <a:latin typeface="Calibri" charset="0"/>
+                        <a:ea typeface="Calibri" charset="0"/>
+                        <a:cs typeface="Calibri" charset="0"/>
+                      </a:endParaRPr>
+                    </a:p>
+                  </a:txBody>
+                  <a:tcPr marL="128016" marR="128016" marT="36576" marB="36576" anchor="ctr">
+                    <a:lnL w="12700" cap="flat" cmpd="sng" algn="ctr">
+                      <a:solidFill>
+                        <a:srgbClr val="E2E4F0"/>
+                      </a:solidFill>
+                      <a:prstDash val="solid"/>
+                      <a:round/>
+                      <a:headEnd type="none" w="med" len="med"/>
+                      <a:tailEnd type="none" w="med" len="med"/>
+                    </a:lnL>
+                    <a:lnR w="12700" cap="flat" cmpd="sng" algn="ctr">
+                      <a:solidFill>
+                        <a:srgbClr val="E2E4F0"/>
+                      </a:solidFill>
+                      <a:prstDash val="solid"/>
+                      <a:round/>
+                      <a:headEnd type="none" w="med" len="med"/>
+                      <a:tailEnd type="none" w="med" len="med"/>
+                    </a:lnR>
+                    <a:lnT w="12700" cap="flat" cmpd="sng" algn="ctr">
+                      <a:solidFill>
+                        <a:srgbClr val="E2E4F0"/>
+                      </a:solidFill>
+                      <a:prstDash val="solid"/>
+                      <a:round/>
+                      <a:headEnd type="none" w="med" len="med"/>
+                      <a:tailEnd type="none" w="med" len="med"/>
+                    </a:lnT>
+                    <a:lnB w="12700" cap="flat" cmpd="sng" algn="ctr">
+                      <a:solidFill>
+                        <a:srgbClr val="E2E4F0"/>
+                      </a:solidFill>
+                      <a:prstDash val="solid"/>
+                      <a:round/>
+                      <a:headEnd type="none" w="med" len="med"/>
+                      <a:tailEnd type="none" w="med" len="med"/>
+                    </a:lnB>
+                    <a:solidFill>
+                      <a:schemeClr val="bg1"/>
+                    </a:solidFill>
+                  </a:tcPr>
+                </a:tc>
+                <a:tc>
+                  <a:txBody>
+                    <a:bodyPr/>
+                    <a:lstStyle/>
+                    <a:p>
+                      <a:pPr algn="ctr" indent="0" marL="0">
+                        <a:buNone/>
+                      </a:pPr>
+                      <a:r>
+                        <a:rPr lang="en-US" sz="1500" b="1" dirty="0">
+                          <a:solidFill>
+                            <a:srgbClr val="2E7D32"/>
+                          </a:solidFill>
+                          <a:latin typeface="Calibri" pitchFamily="34" charset="0"/>
+                          <a:ea typeface="Calibri" pitchFamily="34" charset="-122"/>
+                          <a:cs typeface="Calibri" pitchFamily="34" charset="-120"/>
+                        </a:rPr>
+                        <a:t>✓  Yes</a:t>
+                      </a:r>
+                      <a:endParaRPr lang="en-US" sz="1500" dirty="0">
+                        <a:latin typeface="Calibri" charset="0"/>
+                        <a:ea typeface="Calibri" charset="0"/>
+                        <a:cs typeface="Calibri" charset="0"/>
+                      </a:endParaRPr>
+                    </a:p>
+                  </a:txBody>
+                  <a:tcPr marL="128016" marR="128016" marT="36576" marB="36576" anchor="ctr">
+                    <a:lnL w="12700" cap="flat" cmpd="sng" algn="ctr">
+                      <a:solidFill>
+                        <a:srgbClr val="E2E4F0"/>
+                      </a:solidFill>
+                      <a:prstDash val="solid"/>
+                      <a:round/>
+                      <a:headEnd type="none" w="med" len="med"/>
+                      <a:tailEnd type="none" w="med" len="med"/>
+                    </a:lnL>
+                    <a:lnR w="12700" cap="flat" cmpd="sng" algn="ctr">
+                      <a:solidFill>
+                        <a:srgbClr val="E2E4F0"/>
+                      </a:solidFill>
+                      <a:prstDash val="solid"/>
+                      <a:round/>
+                      <a:headEnd type="none" w="med" len="med"/>
+                      <a:tailEnd type="none" w="med" len="med"/>
+                    </a:lnR>
+                    <a:lnT w="12700" cap="flat" cmpd="sng" algn="ctr">
+                      <a:solidFill>
+                        <a:srgbClr val="E2E4F0"/>
+                      </a:solidFill>
+                      <a:prstDash val="solid"/>
+                      <a:round/>
+                      <a:headEnd type="none" w="med" len="med"/>
+                      <a:tailEnd type="none" w="med" len="med"/>
+                    </a:lnT>
+                    <a:lnB w="12700" cap="flat" cmpd="sng" algn="ctr">
+                      <a:solidFill>
+                        <a:srgbClr val="E2E4F0"/>
+                      </a:solidFill>
+                      <a:prstDash val="solid"/>
+                      <a:round/>
+                      <a:headEnd type="none" w="med" len="med"/>
+                      <a:tailEnd type="none" w="med" len="med"/>
+                    </a:lnB>
+                    <a:solidFill>
+                      <a:schemeClr val="accent2"/>
+                    </a:solidFill>
+                  </a:tcPr>
+                </a:tc>
+              </a:tr>
+              <a:tr h="713232">
+                <a:tc>
+                  <a:txBody>
+                    <a:bodyPr/>
+                    <a:lstStyle/>
+                    <a:p>
+                      <a:pPr indent="0" marL="0">
+                        <a:buNone/>
+                      </a:pPr>
+                      <a:r>
+                        <a:rPr lang="en-US" sz="1500" b="1" dirty="0">
+                          <a:solidFill>
+                            <a:schemeClr val="tx1"/>
+                          </a:solidFill>
+                          <a:latin typeface="Calibri" pitchFamily="34" charset="0"/>
+                          <a:ea typeface="Calibri" pitchFamily="34" charset="-122"/>
+                          <a:cs typeface="Calibri" pitchFamily="34" charset="-120"/>
+                        </a:rPr>
+                        <a:t>Auto quiz + spaced review</a:t>
+                      </a:r>
+                      <a:endParaRPr lang="en-US" sz="1500" dirty="0">
+                        <a:latin typeface="Calibri" charset="0"/>
+                        <a:ea typeface="Calibri" charset="0"/>
+                        <a:cs typeface="Calibri" charset="0"/>
+                      </a:endParaRPr>
+                    </a:p>
+                  </a:txBody>
+                  <a:tcPr marL="128016" marR="128016" marT="36576" marB="36576" anchor="ctr">
+                    <a:lnL w="12700" cap="flat" cmpd="sng" algn="ctr">
+                      <a:solidFill>
+                        <a:srgbClr val="E2E4F0"/>
+                      </a:solidFill>
+                      <a:prstDash val="solid"/>
+                      <a:round/>
+                      <a:headEnd type="none" w="med" len="med"/>
+                      <a:tailEnd type="none" w="med" len="med"/>
+                    </a:lnL>
+                    <a:lnR w="12700" cap="flat" cmpd="sng" algn="ctr">
+                      <a:solidFill>
+                        <a:srgbClr val="E2E4F0"/>
+                      </a:solidFill>
+                      <a:prstDash val="solid"/>
+                      <a:round/>
+                      <a:headEnd type="none" w="med" len="med"/>
+                      <a:tailEnd type="none" w="med" len="med"/>
+                    </a:lnR>
+                    <a:lnT w="12700" cap="flat" cmpd="sng" algn="ctr">
+                      <a:solidFill>
+                        <a:srgbClr val="E2E4F0"/>
+                      </a:solidFill>
+                      <a:prstDash val="solid"/>
+                      <a:round/>
+                      <a:headEnd type="none" w="med" len="med"/>
+                      <a:tailEnd type="none" w="med" len="med"/>
+                    </a:lnT>
+                    <a:lnB w="12700" cap="flat" cmpd="sng" algn="ctr">
+                      <a:solidFill>
+                        <a:srgbClr val="E2E4F0"/>
+                      </a:solidFill>
+                      <a:prstDash val="solid"/>
+                      <a:round/>
+                      <a:headEnd type="none" w="med" len="med"/>
+                      <a:tailEnd type="none" w="med" len="med"/>
+                    </a:lnB>
+                    <a:solidFill>
+                      <a:schemeClr val="bg2"/>
+                    </a:solidFill>
+                  </a:tcPr>
+                </a:tc>
+                <a:tc>
+                  <a:txBody>
+                    <a:bodyPr/>
+                    <a:lstStyle/>
+                    <a:p>
+                      <a:pPr algn="ctr" indent="0" marL="0">
+                        <a:buNone/>
+                      </a:pPr>
+                      <a:r>
+                        <a:rPr lang="en-US" sz="1500" dirty="0">
+                          <a:solidFill>
+                            <a:srgbClr val="9AA0AE"/>
+                          </a:solidFill>
+                          <a:latin typeface="Calibri" pitchFamily="34" charset="0"/>
+                          <a:ea typeface="Calibri" pitchFamily="34" charset="-122"/>
+                          <a:cs typeface="Calibri" pitchFamily="34" charset="-120"/>
+                        </a:rPr>
+                        <a:t>✗  No</a:t>
+                      </a:r>
+                      <a:endParaRPr lang="en-US" sz="1500" dirty="0">
+                        <a:latin typeface="Calibri" charset="0"/>
+                        <a:ea typeface="Calibri" charset="0"/>
+                        <a:cs typeface="Calibri" charset="0"/>
+                      </a:endParaRPr>
+                    </a:p>
+                  </a:txBody>
+                  <a:tcPr marL="128016" marR="128016" marT="36576" marB="36576" anchor="ctr">
+                    <a:lnL w="12700" cap="flat" cmpd="sng" algn="ctr">
+                      <a:solidFill>
+                        <a:srgbClr val="E2E4F0"/>
+                      </a:solidFill>
+                      <a:prstDash val="solid"/>
+                      <a:round/>
+                      <a:headEnd type="none" w="med" len="med"/>
+                      <a:tailEnd type="none" w="med" len="med"/>
+                    </a:lnL>
+                    <a:lnR w="12700" cap="flat" cmpd="sng" algn="ctr">
+                      <a:solidFill>
+                        <a:srgbClr val="E2E4F0"/>
+                      </a:solidFill>
+                      <a:prstDash val="solid"/>
+                      <a:round/>
+                      <a:headEnd type="none" w="med" len="med"/>
+                      <a:tailEnd type="none" w="med" len="med"/>
+                    </a:lnR>
+                    <a:lnT w="12700" cap="flat" cmpd="sng" algn="ctr">
+                      <a:solidFill>
+                        <a:srgbClr val="E2E4F0"/>
+                      </a:solidFill>
+                      <a:prstDash val="solid"/>
+                      <a:round/>
+                      <a:headEnd type="none" w="med" len="med"/>
+                      <a:tailEnd type="none" w="med" len="med"/>
+                    </a:lnT>
+                    <a:lnB w="12700" cap="flat" cmpd="sng" algn="ctr">
+                      <a:solidFill>
+                        <a:srgbClr val="E2E4F0"/>
+                      </a:solidFill>
+                      <a:prstDash val="solid"/>
+                      <a:round/>
+                      <a:headEnd type="none" w="med" len="med"/>
+                      <a:tailEnd type="none" w="med" len="med"/>
+                    </a:lnB>
+                    <a:solidFill>
+                      <a:schemeClr val="bg1"/>
+                    </a:solidFill>
+                  </a:tcPr>
+                </a:tc>
+                <a:tc>
+                  <a:txBody>
+                    <a:bodyPr/>
+                    <a:lstStyle/>
+                    <a:p>
+                      <a:pPr algn="ctr" indent="0" marL="0">
+                        <a:buNone/>
+                      </a:pPr>
+                      <a:r>
+                        <a:rPr lang="en-US" sz="1500" dirty="0">
+                          <a:solidFill>
+                            <a:srgbClr val="B26A00"/>
+                          </a:solidFill>
+                          <a:latin typeface="Calibri" pitchFamily="34" charset="0"/>
+                          <a:ea typeface="Calibri" pitchFamily="34" charset="-122"/>
+                          <a:cs typeface="Calibri" pitchFamily="34" charset="-120"/>
+                        </a:rPr>
+                        <a:t>◐  Partial</a:t>
+                      </a:r>
+                      <a:endParaRPr lang="en-US" sz="1500" dirty="0">
+                        <a:latin typeface="Calibri" charset="0"/>
+                        <a:ea typeface="Calibri" charset="0"/>
+                        <a:cs typeface="Calibri" charset="0"/>
+                      </a:endParaRPr>
+                    </a:p>
+                  </a:txBody>
+                  <a:tcPr marL="128016" marR="128016" marT="36576" marB="36576" anchor="ctr">
+                    <a:lnL w="12700" cap="flat" cmpd="sng" algn="ctr">
+                      <a:solidFill>
+                        <a:srgbClr val="E2E4F0"/>
+                      </a:solidFill>
+                      <a:prstDash val="solid"/>
+                      <a:round/>
+                      <a:headEnd type="none" w="med" len="med"/>
+                      <a:tailEnd type="none" w="med" len="med"/>
+                    </a:lnL>
+                    <a:lnR w="12700" cap="flat" cmpd="sng" algn="ctr">
+                      <a:solidFill>
+                        <a:srgbClr val="E2E4F0"/>
+                      </a:solidFill>
+                      <a:prstDash val="solid"/>
+                      <a:round/>
+                      <a:headEnd type="none" w="med" len="med"/>
+                      <a:tailEnd type="none" w="med" len="med"/>
+                    </a:lnR>
+                    <a:lnT w="12700" cap="flat" cmpd="sng" algn="ctr">
+                      <a:solidFill>
+                        <a:srgbClr val="E2E4F0"/>
+                      </a:solidFill>
+                      <a:prstDash val="solid"/>
+                      <a:round/>
+                      <a:headEnd type="none" w="med" len="med"/>
+                      <a:tailEnd type="none" w="med" len="med"/>
+                    </a:lnT>
+                    <a:lnB w="12700" cap="flat" cmpd="sng" algn="ctr">
+                      <a:solidFill>
+                        <a:srgbClr val="E2E4F0"/>
+                      </a:solidFill>
+                      <a:prstDash val="solid"/>
+                      <a:round/>
+                      <a:headEnd type="none" w="med" len="med"/>
+                      <a:tailEnd type="none" w="med" len="med"/>
+                    </a:lnB>
+                    <a:solidFill>
+                      <a:schemeClr val="bg1"/>
+                    </a:solidFill>
+                  </a:tcPr>
+                </a:tc>
+                <a:tc>
+                  <a:txBody>
+                    <a:bodyPr/>
+                    <a:lstStyle/>
+                    <a:p>
+                      <a:pPr algn="ctr" indent="0" marL="0">
+                        <a:buNone/>
+                      </a:pPr>
+                      <a:r>
+                        <a:rPr lang="en-US" sz="1500" b="1" dirty="0">
+                          <a:solidFill>
+                            <a:srgbClr val="2E7D32"/>
+                          </a:solidFill>
+                          <a:latin typeface="Calibri" pitchFamily="34" charset="0"/>
+                          <a:ea typeface="Calibri" pitchFamily="34" charset="-122"/>
+                          <a:cs typeface="Calibri" pitchFamily="34" charset="-120"/>
+                        </a:rPr>
+                        <a:t>✓  Yes (SM-2)</a:t>
+                      </a:r>
+                      <a:endParaRPr lang="en-US" sz="1500" dirty="0">
+                        <a:latin typeface="Calibri" charset="0"/>
+                        <a:ea typeface="Calibri" charset="0"/>
+                        <a:cs typeface="Calibri" charset="0"/>
+                      </a:endParaRPr>
+                    </a:p>
+                  </a:txBody>
+                  <a:tcPr marL="128016" marR="128016" marT="36576" marB="36576" anchor="ctr">
+                    <a:lnL w="12700" cap="flat" cmpd="sng" algn="ctr">
+                      <a:solidFill>
+                        <a:srgbClr val="E2E4F0"/>
+                      </a:solidFill>
+                      <a:prstDash val="solid"/>
+                      <a:round/>
+                      <a:headEnd type="none" w="med" len="med"/>
+                      <a:tailEnd type="none" w="med" len="med"/>
+                    </a:lnL>
+                    <a:lnR w="12700" cap="flat" cmpd="sng" algn="ctr">
+                      <a:solidFill>
+                        <a:srgbClr val="E2E4F0"/>
+                      </a:solidFill>
+                      <a:prstDash val="solid"/>
+                      <a:round/>
+                      <a:headEnd type="none" w="med" len="med"/>
+                      <a:tailEnd type="none" w="med" len="med"/>
+                    </a:lnR>
+                    <a:lnT w="12700" cap="flat" cmpd="sng" algn="ctr">
+                      <a:solidFill>
+                        <a:srgbClr val="E2E4F0"/>
+                      </a:solidFill>
+                      <a:prstDash val="solid"/>
+                      <a:round/>
+                      <a:headEnd type="none" w="med" len="med"/>
+                      <a:tailEnd type="none" w="med" len="med"/>
+                    </a:lnT>
+                    <a:lnB w="12700" cap="flat" cmpd="sng" algn="ctr">
+                      <a:solidFill>
+                        <a:srgbClr val="E2E4F0"/>
+                      </a:solidFill>
+                      <a:prstDash val="solid"/>
+                      <a:round/>
+                      <a:headEnd type="none" w="med" len="med"/>
+                      <a:tailEnd type="none" w="med" len="med"/>
+                    </a:lnB>
+                    <a:solidFill>
+                      <a:schemeClr val="accent2"/>
+                    </a:solidFill>
+                  </a:tcPr>
+                </a:tc>
+              </a:tr>
+              <a:tr h="713232">
+                <a:tc>
+                  <a:txBody>
+                    <a:bodyPr/>
+                    <a:lstStyle/>
+                    <a:p>
+                      <a:pPr indent="0" marL="0">
+                        <a:buNone/>
+                      </a:pPr>
+                      <a:r>
+                        <a:rPr lang="en-US" sz="1500" b="1" dirty="0">
+                          <a:solidFill>
+                            <a:schemeClr val="tx1"/>
+                          </a:solidFill>
+                          <a:latin typeface="Calibri" pitchFamily="34" charset="0"/>
+                          <a:ea typeface="Calibri" pitchFamily="34" charset="-122"/>
+                          <a:cs typeface="Calibri" pitchFamily="34" charset="-120"/>
+                        </a:rPr>
+                        <a:t>Cost to the student</a:t>
+                      </a:r>
+                      <a:endParaRPr lang="en-US" sz="1500" dirty="0">
+                        <a:latin typeface="Calibri" charset="0"/>
+                        <a:ea typeface="Calibri" charset="0"/>
+                        <a:cs typeface="Calibri" charset="0"/>
+                      </a:endParaRPr>
+                    </a:p>
+                  </a:txBody>
+                  <a:tcPr marL="128016" marR="128016" marT="36576" marB="36576" anchor="ctr">
+                    <a:lnL w="12700" cap="flat" cmpd="sng" algn="ctr">
+                      <a:solidFill>
+                        <a:srgbClr val="E2E4F0"/>
+                      </a:solidFill>
+                      <a:prstDash val="solid"/>
+                      <a:round/>
+                      <a:headEnd type="none" w="med" len="med"/>
+                      <a:tailEnd type="none" w="med" len="med"/>
+                    </a:lnL>
+                    <a:lnR w="12700" cap="flat" cmpd="sng" algn="ctr">
+                      <a:solidFill>
+                        <a:srgbClr val="E2E4F0"/>
+                      </a:solidFill>
+                      <a:prstDash val="solid"/>
+                      <a:round/>
+                      <a:headEnd type="none" w="med" len="med"/>
+                      <a:tailEnd type="none" w="med" len="med"/>
+                    </a:lnR>
+                    <a:lnT w="12700" cap="flat" cmpd="sng" algn="ctr">
+                      <a:solidFill>
+                        <a:srgbClr val="E2E4F0"/>
+                      </a:solidFill>
+                      <a:prstDash val="solid"/>
+                      <a:round/>
+                      <a:headEnd type="none" w="med" len="med"/>
+                      <a:tailEnd type="none" w="med" len="med"/>
+                    </a:lnT>
+                    <a:lnB w="12700" cap="flat" cmpd="sng" algn="ctr">
+                      <a:solidFill>
+                        <a:srgbClr val="E2E4F0"/>
+                      </a:solidFill>
+                      <a:prstDash val="solid"/>
+                      <a:round/>
+                      <a:headEnd type="none" w="med" len="med"/>
+                      <a:tailEnd type="none" w="med" len="med"/>
+                    </a:lnB>
+                    <a:solidFill>
+                      <a:schemeClr val="bg2"/>
+                    </a:solidFill>
+                  </a:tcPr>
+                </a:tc>
+                <a:tc>
+                  <a:txBody>
+                    <a:bodyPr/>
+                    <a:lstStyle/>
+                    <a:p>
+                      <a:pPr algn="ctr" indent="0" marL="0">
+                        <a:buNone/>
+                      </a:pPr>
+                      <a:r>
+                        <a:rPr lang="en-US" sz="1500" dirty="0">
+                          <a:solidFill>
+                            <a:schemeClr val="tx1"/>
+                          </a:solidFill>
+                          <a:latin typeface="Calibri" pitchFamily="34" charset="0"/>
+                          <a:ea typeface="Calibri" pitchFamily="34" charset="-122"/>
+                          <a:cs typeface="Calibri" pitchFamily="34" charset="-120"/>
+                        </a:rPr>
+                        <a:t>₹0</a:t>
+                      </a:r>
+                      <a:endParaRPr lang="en-US" sz="1500" dirty="0">
+                        <a:latin typeface="Calibri" charset="0"/>
+                        <a:ea typeface="Calibri" charset="0"/>
+                        <a:cs typeface="Calibri" charset="0"/>
+                      </a:endParaRPr>
+                    </a:p>
+                  </a:txBody>
+                  <a:tcPr marL="128016" marR="128016" marT="36576" marB="36576" anchor="ctr">
+                    <a:lnL w="12700" cap="flat" cmpd="sng" algn="ctr">
+                      <a:solidFill>
+                        <a:srgbClr val="E2E4F0"/>
+                      </a:solidFill>
+                      <a:prstDash val="solid"/>
+                      <a:round/>
+                      <a:headEnd type="none" w="med" len="med"/>
+                      <a:tailEnd type="none" w="med" len="med"/>
+                    </a:lnL>
+                    <a:lnR w="12700" cap="flat" cmpd="sng" algn="ctr">
+                      <a:solidFill>
+                        <a:srgbClr val="E2E4F0"/>
+                      </a:solidFill>
+                      <a:prstDash val="solid"/>
+                      <a:round/>
+                      <a:headEnd type="none" w="med" len="med"/>
+                      <a:tailEnd type="none" w="med" len="med"/>
+                    </a:lnR>
+                    <a:lnT w="12700" cap="flat" cmpd="sng" algn="ctr">
+                      <a:solidFill>
+                        <a:srgbClr val="E2E4F0"/>
+                      </a:solidFill>
+                      <a:prstDash val="solid"/>
+                      <a:round/>
+                      <a:headEnd type="none" w="med" len="med"/>
+                      <a:tailEnd type="none" w="med" len="med"/>
+                    </a:lnT>
+                    <a:lnB w="12700" cap="flat" cmpd="sng" algn="ctr">
+                      <a:solidFill>
+                        <a:srgbClr val="E2E4F0"/>
+                      </a:solidFill>
+                      <a:prstDash val="solid"/>
+                      <a:round/>
+                      <a:headEnd type="none" w="med" len="med"/>
+                      <a:tailEnd type="none" w="med" len="med"/>
+                    </a:lnB>
+                    <a:solidFill>
+                      <a:schemeClr val="bg1"/>
+                    </a:solidFill>
+                  </a:tcPr>
+                </a:tc>
+                <a:tc>
+                  <a:txBody>
+                    <a:bodyPr/>
+                    <a:lstStyle/>
+                    <a:p>
+                      <a:pPr algn="ctr" indent="0" marL="0">
+                        <a:buNone/>
+                      </a:pPr>
+                      <a:r>
+                        <a:rPr lang="en-US" sz="1500" dirty="0">
+                          <a:solidFill>
+                            <a:schemeClr val="tx1"/>
+                          </a:solidFill>
+                          <a:latin typeface="Calibri" pitchFamily="34" charset="0"/>
+                          <a:ea typeface="Calibri" pitchFamily="34" charset="-122"/>
+                          <a:cs typeface="Calibri" pitchFamily="34" charset="-120"/>
+                        </a:rPr>
+                        <a:t>Free tier or paid</a:t>
+                      </a:r>
+                      <a:endParaRPr lang="en-US" sz="1500" dirty="0">
+                        <a:latin typeface="Calibri" charset="0"/>
+                        <a:ea typeface="Calibri" charset="0"/>
+                        <a:cs typeface="Calibri" charset="0"/>
+                      </a:endParaRPr>
+                    </a:p>
+                  </a:txBody>
+                  <a:tcPr marL="128016" marR="128016" marT="36576" marB="36576" anchor="ctr">
+                    <a:lnL w="12700" cap="flat" cmpd="sng" algn="ctr">
+                      <a:solidFill>
+                        <a:srgbClr val="E2E4F0"/>
+                      </a:solidFill>
+                      <a:prstDash val="solid"/>
+                      <a:round/>
+                      <a:headEnd type="none" w="med" len="med"/>
+                      <a:tailEnd type="none" w="med" len="med"/>
+                    </a:lnL>
+                    <a:lnR w="12700" cap="flat" cmpd="sng" algn="ctr">
+                      <a:solidFill>
+                        <a:srgbClr val="E2E4F0"/>
+                      </a:solidFill>
+                      <a:prstDash val="solid"/>
+                      <a:round/>
+                      <a:headEnd type="none" w="med" len="med"/>
+                      <a:tailEnd type="none" w="med" len="med"/>
+                    </a:lnR>
+                    <a:lnT w="12700" cap="flat" cmpd="sng" algn="ctr">
+                      <a:solidFill>
+                        <a:srgbClr val="E2E4F0"/>
+                      </a:solidFill>
+                      <a:prstDash val="solid"/>
+                      <a:round/>
+                      <a:headEnd type="none" w="med" len="med"/>
+                      <a:tailEnd type="none" w="med" len="med"/>
+                    </a:lnT>
+                    <a:lnB w="12700" cap="flat" cmpd="sng" algn="ctr">
+                      <a:solidFill>
+                        <a:srgbClr val="E2E4F0"/>
+                      </a:solidFill>
+                      <a:prstDash val="solid"/>
+                      <a:round/>
+                      <a:headEnd type="none" w="med" len="med"/>
+                      <a:tailEnd type="none" w="med" len="med"/>
+                    </a:lnB>
+                    <a:solidFill>
+                      <a:schemeClr val="bg1"/>
+                    </a:solidFill>
+                  </a:tcPr>
+                </a:tc>
+                <a:tc>
+                  <a:txBody>
+                    <a:bodyPr/>
+                    <a:lstStyle/>
+                    <a:p>
+                      <a:pPr algn="ctr" indent="0" marL="0">
+                        <a:buNone/>
+                      </a:pPr>
+                      <a:r>
+                        <a:rPr lang="en-US" sz="1500" b="1" dirty="0">
+                          <a:solidFill>
+                            <a:schemeClr val="accent3"/>
+                          </a:solidFill>
+                          <a:latin typeface="Calibri" pitchFamily="34" charset="0"/>
+                          <a:ea typeface="Calibri" pitchFamily="34" charset="-122"/>
+                          <a:cs typeface="Calibri" pitchFamily="34" charset="-120"/>
+                        </a:rPr>
+                        <a:t>₹0 / offline</a:t>
+                      </a:r>
+                      <a:endParaRPr lang="en-US" sz="1500" dirty="0">
+                        <a:latin typeface="Calibri" charset="0"/>
+                        <a:ea typeface="Calibri" charset="0"/>
+                        <a:cs typeface="Calibri" charset="0"/>
+                      </a:endParaRPr>
+                    </a:p>
+                  </a:txBody>
+                  <a:tcPr marL="128016" marR="128016" marT="36576" marB="36576" anchor="ctr">
+                    <a:lnL w="12700" cap="flat" cmpd="sng" algn="ctr">
+                      <a:solidFill>
+                        <a:srgbClr val="E2E4F0"/>
+                      </a:solidFill>
+                      <a:prstDash val="solid"/>
+                      <a:round/>
+                      <a:headEnd type="none" w="med" len="med"/>
+                      <a:tailEnd type="none" w="med" len="med"/>
+                    </a:lnL>
+                    <a:lnR w="12700" cap="flat" cmpd="sng" algn="ctr">
+                      <a:solidFill>
+                        <a:srgbClr val="E2E4F0"/>
+                      </a:solidFill>
+                      <a:prstDash val="solid"/>
+                      <a:round/>
+                      <a:headEnd type="none" w="med" len="med"/>
+                      <a:tailEnd type="none" w="med" len="med"/>
+                    </a:lnR>
+                    <a:lnT w="12700" cap="flat" cmpd="sng" algn="ctr">
+                      <a:solidFill>
+                        <a:srgbClr val="E2E4F0"/>
+                      </a:solidFill>
+                      <a:prstDash val="solid"/>
+                      <a:round/>
+                      <a:headEnd type="none" w="med" len="med"/>
+                      <a:tailEnd type="none" w="med" len="med"/>
+                    </a:lnT>
+                    <a:lnB w="12700" cap="flat" cmpd="sng" algn="ctr">
+                      <a:solidFill>
+                        <a:srgbClr val="E2E4F0"/>
+                      </a:solidFill>
+                      <a:prstDash val="solid"/>
+                      <a:round/>
+                      <a:headEnd type="none" w="med" len="med"/>
+                      <a:tailEnd type="none" w="med" len="med"/>
+                    </a:lnB>
+                    <a:solidFill>
+                      <a:schemeClr val="accent2"/>
+                    </a:solidFill>
+                  </a:tcPr>
+                </a:tc>
+              </a:tr>
+            </a:tbl>
+          </a:graphicData>
+        </a:graphic>
+      </p:graphicFrame>
       <p:sp>
         <p:nvSpPr>
           <p:cNvPr id="25" name="Slide Number Placeholder 0"/>
@@ -7648,7 +9693,7 @@
                   <a:schemeClr val="tx1"/>
                 </a:solidFill>
               </a:rPr>
-              <a:t>Live demo in 3 minutes</a:t>
+              <a:t>Measured results</a:t>
             </a:r>
             <a:endParaRPr lang="en-US" sz="3600" dirty="0"/>
           </a:p>
@@ -7656,581 +9701,24 @@
       </p:sp>
       <p:sp>
         <p:nvSpPr>
-          <p:cNvPr id="3" name="Step 1 dot"/>
+          <p:cNvPr id="3" name="Result 1 card"/>
           <p:cNvSpPr/>
           <p:nvPr/>
         </p:nvSpPr>
         <p:spPr>
           <a:xfrm>
-            <a:off x="548640" y="1472184"/>
-            <a:ext cx="457200" cy="457200"/>
-          </a:xfrm>
-          <a:prstGeom prst="ellipse">
-            <a:avLst/>
-          </a:prstGeom>
-          <a:solidFill>
-            <a:schemeClr val="accent1"/>
-          </a:solidFill>
-          <a:ln/>
-        </p:spPr>
-      </p:sp>
-      <p:sp>
-        <p:nvSpPr>
-          <p:cNvPr id="4" name="Step 1 number"/>
-          <p:cNvSpPr txBox="1"/>
-          <p:nvPr/>
-        </p:nvSpPr>
-        <p:spPr>
-          <a:xfrm>
-            <a:off x="548640" y="1472184"/>
-            <a:ext cx="457200" cy="457200"/>
-          </a:xfrm>
-          <a:prstGeom prst="rect">
-            <a:avLst/>
-          </a:prstGeom>
-          <a:noFill/>
-          <a:ln/>
-        </p:spPr>
-        <p:txBody>
-          <a:bodyPr wrap="square" lIns="0" tIns="0" rIns="0" bIns="0" rtlCol="0" anchor="ctr"/>
-          <a:lstStyle/>
-          <a:p>
-            <a:pPr algn="ctr" indent="0" marL="0">
-              <a:buNone/>
-            </a:pPr>
-            <a:r>
-              <a:rPr lang="en-US" sz="1600" b="1" dirty="0">
-                <a:solidFill>
-                  <a:schemeClr val="bg1"/>
-                </a:solidFill>
-              </a:rPr>
-              <a:t>1</a:t>
-            </a:r>
-            <a:endParaRPr lang="en-US" sz="1600" dirty="0"/>
-          </a:p>
-        </p:txBody>
-      </p:sp>
-      <p:sp>
-        <p:nvSpPr>
-          <p:cNvPr id="5" name="Step 1 text"/>
-          <p:cNvSpPr txBox="1"/>
-          <p:nvPr/>
-        </p:nvSpPr>
-        <p:spPr>
-          <a:xfrm>
-            <a:off x="1234440" y="1371600"/>
-            <a:ext cx="5120640" cy="658368"/>
-          </a:xfrm>
-          <a:prstGeom prst="rect">
-            <a:avLst/>
-          </a:prstGeom>
-          <a:noFill/>
-          <a:ln/>
-        </p:spPr>
-        <p:txBody>
-          <a:bodyPr wrap="square" lIns="0" tIns="0" rIns="0" bIns="0" rtlCol="0" anchor="ctr"/>
-          <a:lstStyle/>
-          <a:p>
-            <a:pPr indent="0" marL="0">
-              <a:buNone/>
-            </a:pPr>
-            <a:r>
-              <a:rPr lang="en-US" sz="1600" dirty="0">
-                <a:solidFill>
-                  <a:schemeClr val="tx1"/>
-                </a:solidFill>
-              </a:rPr>
-              <a:t>Turn Wi-Fi off and click Load demo notes</a:t>
-            </a:r>
-            <a:endParaRPr lang="en-US" sz="1600" dirty="0"/>
-          </a:p>
-        </p:txBody>
-      </p:sp>
-      <p:sp>
-        <p:nvSpPr>
-          <p:cNvPr id="6" name="Step 2 dot"/>
-          <p:cNvSpPr/>
-          <p:nvPr/>
-        </p:nvSpPr>
-        <p:spPr>
-          <a:xfrm>
-            <a:off x="548640" y="2240280"/>
-            <a:ext cx="457200" cy="457200"/>
-          </a:xfrm>
-          <a:prstGeom prst="ellipse">
-            <a:avLst/>
-          </a:prstGeom>
-          <a:solidFill>
-            <a:schemeClr val="accent1"/>
-          </a:solidFill>
-          <a:ln/>
-        </p:spPr>
-      </p:sp>
-      <p:sp>
-        <p:nvSpPr>
-          <p:cNvPr id="7" name="Step 2 number"/>
-          <p:cNvSpPr txBox="1"/>
-          <p:nvPr/>
-        </p:nvSpPr>
-        <p:spPr>
-          <a:xfrm>
-            <a:off x="548640" y="2240280"/>
-            <a:ext cx="457200" cy="457200"/>
-          </a:xfrm>
-          <a:prstGeom prst="rect">
-            <a:avLst/>
-          </a:prstGeom>
-          <a:noFill/>
-          <a:ln/>
-        </p:spPr>
-        <p:txBody>
-          <a:bodyPr wrap="square" lIns="0" tIns="0" rIns="0" bIns="0" rtlCol="0" anchor="ctr"/>
-          <a:lstStyle/>
-          <a:p>
-            <a:pPr algn="ctr" indent="0" marL="0">
-              <a:buNone/>
-            </a:pPr>
-            <a:r>
-              <a:rPr lang="en-US" sz="1600" b="1" dirty="0">
-                <a:solidFill>
-                  <a:schemeClr val="bg1"/>
-                </a:solidFill>
-              </a:rPr>
-              <a:t>2</a:t>
-            </a:r>
-            <a:endParaRPr lang="en-US" sz="1600" dirty="0"/>
-          </a:p>
-        </p:txBody>
-      </p:sp>
-      <p:sp>
-        <p:nvSpPr>
-          <p:cNvPr id="8" name="Step 2 text"/>
-          <p:cNvSpPr txBox="1"/>
-          <p:nvPr/>
-        </p:nvSpPr>
-        <p:spPr>
-          <a:xfrm>
-            <a:off x="1234440" y="2139696"/>
-            <a:ext cx="5120640" cy="658368"/>
-          </a:xfrm>
-          <a:prstGeom prst="rect">
-            <a:avLst/>
-          </a:prstGeom>
-          <a:noFill/>
-          <a:ln/>
-        </p:spPr>
-        <p:txBody>
-          <a:bodyPr wrap="square" lIns="0" tIns="0" rIns="0" bIns="0" rtlCol="0" anchor="ctr"/>
-          <a:lstStyle/>
-          <a:p>
-            <a:pPr indent="0" marL="0">
-              <a:buNone/>
-            </a:pPr>
-            <a:r>
-              <a:rPr lang="en-US" sz="1600" dirty="0">
-                <a:solidFill>
-                  <a:schemeClr val="tx1"/>
-                </a:solidFill>
-              </a:rPr>
-              <a:t>Summary: drag length slider, click Why? and graph nodes</a:t>
-            </a:r>
-            <a:endParaRPr lang="en-US" sz="1600" dirty="0"/>
-          </a:p>
-        </p:txBody>
-      </p:sp>
-      <p:sp>
-        <p:nvSpPr>
-          <p:cNvPr id="9" name="Step 3 dot"/>
-          <p:cNvSpPr/>
-          <p:nvPr/>
-        </p:nvSpPr>
-        <p:spPr>
-          <a:xfrm>
-            <a:off x="548640" y="3008376"/>
-            <a:ext cx="457200" cy="457200"/>
-          </a:xfrm>
-          <a:prstGeom prst="ellipse">
-            <a:avLst/>
-          </a:prstGeom>
-          <a:solidFill>
-            <a:schemeClr val="accent1"/>
-          </a:solidFill>
-          <a:ln/>
-        </p:spPr>
-      </p:sp>
-      <p:sp>
-        <p:nvSpPr>
-          <p:cNvPr id="10" name="Step 3 number"/>
-          <p:cNvSpPr txBox="1"/>
-          <p:nvPr/>
-        </p:nvSpPr>
-        <p:spPr>
-          <a:xfrm>
-            <a:off x="548640" y="3008376"/>
-            <a:ext cx="457200" cy="457200"/>
-          </a:xfrm>
-          <a:prstGeom prst="rect">
-            <a:avLst/>
-          </a:prstGeom>
-          <a:noFill/>
-          <a:ln/>
-        </p:spPr>
-        <p:txBody>
-          <a:bodyPr wrap="square" lIns="0" tIns="0" rIns="0" bIns="0" rtlCol="0" anchor="ctr"/>
-          <a:lstStyle/>
-          <a:p>
-            <a:pPr algn="ctr" indent="0" marL="0">
-              <a:buNone/>
-            </a:pPr>
-            <a:r>
-              <a:rPr lang="en-US" sz="1600" b="1" dirty="0">
-                <a:solidFill>
-                  <a:schemeClr val="bg1"/>
-                </a:solidFill>
-              </a:rPr>
-              <a:t>3</a:t>
-            </a:r>
-            <a:endParaRPr lang="en-US" sz="1600" dirty="0"/>
-          </a:p>
-        </p:txBody>
-      </p:sp>
-      <p:sp>
-        <p:nvSpPr>
-          <p:cNvPr id="11" name="Step 3 text"/>
-          <p:cNvSpPr txBox="1"/>
-          <p:nvPr/>
-        </p:nvSpPr>
-        <p:spPr>
-          <a:xfrm>
-            <a:off x="1234440" y="2907792"/>
-            <a:ext cx="5120640" cy="658368"/>
-          </a:xfrm>
-          <a:prstGeom prst="rect">
-            <a:avLst/>
-          </a:prstGeom>
-          <a:noFill/>
-          <a:ln/>
-        </p:spPr>
-        <p:txBody>
-          <a:bodyPr wrap="square" lIns="0" tIns="0" rIns="0" bIns="0" rtlCol="0" anchor="ctr"/>
-          <a:lstStyle/>
-          <a:p>
-            <a:pPr indent="0" marL="0">
-              <a:buNone/>
-            </a:pPr>
-            <a:r>
-              <a:rPr lang="en-US" sz="1600" dirty="0">
-                <a:solidFill>
-                  <a:schemeClr val="tx1"/>
-                </a:solidFill>
-              </a:rPr>
-              <a:t>Concepts: click a chip to see its evidence</a:t>
-            </a:r>
-            <a:endParaRPr lang="en-US" sz="1600" dirty="0"/>
-          </a:p>
-        </p:txBody>
-      </p:sp>
-      <p:sp>
-        <p:nvSpPr>
-          <p:cNvPr id="12" name="Step 4 dot"/>
-          <p:cNvSpPr/>
-          <p:nvPr/>
-        </p:nvSpPr>
-        <p:spPr>
-          <a:xfrm>
-            <a:off x="548640" y="3776472"/>
-            <a:ext cx="457200" cy="457200"/>
-          </a:xfrm>
-          <a:prstGeom prst="ellipse">
-            <a:avLst/>
-          </a:prstGeom>
-          <a:solidFill>
-            <a:schemeClr val="accent1"/>
-          </a:solidFill>
-          <a:ln/>
-        </p:spPr>
-      </p:sp>
-      <p:sp>
-        <p:nvSpPr>
-          <p:cNvPr id="13" name="Step 4 number"/>
-          <p:cNvSpPr txBox="1"/>
-          <p:nvPr/>
-        </p:nvSpPr>
-        <p:spPr>
-          <a:xfrm>
-            <a:off x="548640" y="3776472"/>
-            <a:ext cx="457200" cy="457200"/>
-          </a:xfrm>
-          <a:prstGeom prst="rect">
-            <a:avLst/>
-          </a:prstGeom>
-          <a:noFill/>
-          <a:ln/>
-        </p:spPr>
-        <p:txBody>
-          <a:bodyPr wrap="square" lIns="0" tIns="0" rIns="0" bIns="0" rtlCol="0" anchor="ctr"/>
-          <a:lstStyle/>
-          <a:p>
-            <a:pPr algn="ctr" indent="0" marL="0">
-              <a:buNone/>
-            </a:pPr>
-            <a:r>
-              <a:rPr lang="en-US" sz="1600" b="1" dirty="0">
-                <a:solidFill>
-                  <a:schemeClr val="bg1"/>
-                </a:solidFill>
-              </a:rPr>
-              <a:t>4</a:t>
-            </a:r>
-            <a:endParaRPr lang="en-US" sz="1600" dirty="0"/>
-          </a:p>
-        </p:txBody>
-      </p:sp>
-      <p:sp>
-        <p:nvSpPr>
-          <p:cNvPr id="14" name="Step 4 text"/>
-          <p:cNvSpPr txBox="1"/>
-          <p:nvPr/>
-        </p:nvSpPr>
-        <p:spPr>
-          <a:xfrm>
-            <a:off x="1234440" y="3675888"/>
-            <a:ext cx="5120640" cy="658368"/>
-          </a:xfrm>
-          <a:prstGeom prst="rect">
-            <a:avLst/>
-          </a:prstGeom>
-          <a:noFill/>
-          <a:ln/>
-        </p:spPr>
-        <p:txBody>
-          <a:bodyPr wrap="square" lIns="0" tIns="0" rIns="0" bIns="0" rtlCol="0" anchor="ctr"/>
-          <a:lstStyle/>
-          <a:p>
-            <a:pPr indent="0" marL="0">
-              <a:buNone/>
-            </a:pPr>
-            <a:r>
-              <a:rPr lang="en-US" sz="1600" dirty="0">
-                <a:solidFill>
-                  <a:schemeClr val="tx1"/>
-                </a:solidFill>
-              </a:rPr>
-              <a:t>Quiz: answer with a typo, check answers, see readiness rise</a:t>
-            </a:r>
-            <a:endParaRPr lang="en-US" sz="1600" dirty="0"/>
-          </a:p>
-        </p:txBody>
-      </p:sp>
-      <p:sp>
-        <p:nvSpPr>
-          <p:cNvPr id="15" name="Step 5 dot"/>
-          <p:cNvSpPr/>
-          <p:nvPr/>
-        </p:nvSpPr>
-        <p:spPr>
-          <a:xfrm>
-            <a:off x="548640" y="4544568"/>
-            <a:ext cx="457200" cy="457200"/>
-          </a:xfrm>
-          <a:prstGeom prst="ellipse">
-            <a:avLst/>
-          </a:prstGeom>
-          <a:solidFill>
-            <a:schemeClr val="accent1"/>
-          </a:solidFill>
-          <a:ln/>
-        </p:spPr>
-      </p:sp>
-      <p:sp>
-        <p:nvSpPr>
-          <p:cNvPr id="16" name="Step 5 number"/>
-          <p:cNvSpPr txBox="1"/>
-          <p:nvPr/>
-        </p:nvSpPr>
-        <p:spPr>
-          <a:xfrm>
-            <a:off x="548640" y="4544568"/>
-            <a:ext cx="457200" cy="457200"/>
-          </a:xfrm>
-          <a:prstGeom prst="rect">
-            <a:avLst/>
-          </a:prstGeom>
-          <a:noFill/>
-          <a:ln/>
-        </p:spPr>
-        <p:txBody>
-          <a:bodyPr wrap="square" lIns="0" tIns="0" rIns="0" bIns="0" rtlCol="0" anchor="ctr"/>
-          <a:lstStyle/>
-          <a:p>
-            <a:pPr algn="ctr" indent="0" marL="0">
-              <a:buNone/>
-            </a:pPr>
-            <a:r>
-              <a:rPr lang="en-US" sz="1600" b="1" dirty="0">
-                <a:solidFill>
-                  <a:schemeClr val="bg1"/>
-                </a:solidFill>
-              </a:rPr>
-              <a:t>5</a:t>
-            </a:r>
-            <a:endParaRPr lang="en-US" sz="1600" dirty="0"/>
-          </a:p>
-        </p:txBody>
-      </p:sp>
-      <p:sp>
-        <p:nvSpPr>
-          <p:cNvPr id="17" name="Step 5 text"/>
-          <p:cNvSpPr txBox="1"/>
-          <p:nvPr/>
-        </p:nvSpPr>
-        <p:spPr>
-          <a:xfrm>
-            <a:off x="1234440" y="4443984"/>
-            <a:ext cx="5120640" cy="658368"/>
-          </a:xfrm>
-          <a:prstGeom prst="rect">
-            <a:avLst/>
-          </a:prstGeom>
-          <a:noFill/>
-          <a:ln/>
-        </p:spPr>
-        <p:txBody>
-          <a:bodyPr wrap="square" lIns="0" tIns="0" rIns="0" bIns="0" rtlCol="0" anchor="ctr"/>
-          <a:lstStyle/>
-          <a:p>
-            <a:pPr indent="0" marL="0">
-              <a:buNone/>
-            </a:pPr>
-            <a:r>
-              <a:rPr lang="en-US" sz="1600" dirty="0">
-                <a:solidFill>
-                  <a:schemeClr val="tx1"/>
-                </a:solidFill>
-              </a:rPr>
-              <a:t>Flashcards: flip, rate Good and Again, see the SM-2 schedule</a:t>
-            </a:r>
-            <a:endParaRPr lang="en-US" sz="1600" dirty="0"/>
-          </a:p>
-        </p:txBody>
-      </p:sp>
-      <p:sp>
-        <p:nvSpPr>
-          <p:cNvPr id="18" name="Step 6 dot"/>
-          <p:cNvSpPr/>
-          <p:nvPr/>
-        </p:nvSpPr>
-        <p:spPr>
-          <a:xfrm>
-            <a:off x="548640" y="5312664"/>
-            <a:ext cx="457200" cy="457200"/>
-          </a:xfrm>
-          <a:prstGeom prst="ellipse">
-            <a:avLst/>
-          </a:prstGeom>
-          <a:solidFill>
-            <a:schemeClr val="accent1"/>
-          </a:solidFill>
-          <a:ln/>
-        </p:spPr>
-      </p:sp>
-      <p:sp>
-        <p:nvSpPr>
-          <p:cNvPr id="19" name="Step 6 number"/>
-          <p:cNvSpPr txBox="1"/>
-          <p:nvPr/>
-        </p:nvSpPr>
-        <p:spPr>
-          <a:xfrm>
-            <a:off x="548640" y="5312664"/>
-            <a:ext cx="457200" cy="457200"/>
-          </a:xfrm>
-          <a:prstGeom prst="rect">
-            <a:avLst/>
-          </a:prstGeom>
-          <a:noFill/>
-          <a:ln/>
-        </p:spPr>
-        <p:txBody>
-          <a:bodyPr wrap="square" lIns="0" tIns="0" rIns="0" bIns="0" rtlCol="0" anchor="ctr"/>
-          <a:lstStyle/>
-          <a:p>
-            <a:pPr algn="ctr" indent="0" marL="0">
-              <a:buNone/>
-            </a:pPr>
-            <a:r>
-              <a:rPr lang="en-US" sz="1600" b="1" dirty="0">
-                <a:solidFill>
-                  <a:schemeClr val="bg1"/>
-                </a:solidFill>
-              </a:rPr>
-              <a:t>6</a:t>
-            </a:r>
-            <a:endParaRPr lang="en-US" sz="1600" dirty="0"/>
-          </a:p>
-        </p:txBody>
-      </p:sp>
-      <p:sp>
-        <p:nvSpPr>
-          <p:cNvPr id="20" name="Step 6 text"/>
-          <p:cNvSpPr txBox="1"/>
-          <p:nvPr/>
-        </p:nvSpPr>
-        <p:spPr>
-          <a:xfrm>
-            <a:off x="1234440" y="5212080"/>
-            <a:ext cx="5120640" cy="658368"/>
-          </a:xfrm>
-          <a:prstGeom prst="rect">
-            <a:avLst/>
-          </a:prstGeom>
-          <a:noFill/>
-          <a:ln/>
-        </p:spPr>
-        <p:txBody>
-          <a:bodyPr wrap="square" lIns="0" tIns="0" rIns="0" bIns="0" rtlCol="0" anchor="ctr"/>
-          <a:lstStyle/>
-          <a:p>
-            <a:pPr indent="0" marL="0">
-              <a:buNone/>
-            </a:pPr>
-            <a:r>
-              <a:rPr lang="en-US" sz="1600" dirty="0">
-                <a:solidFill>
-                  <a:schemeClr val="tx1"/>
-                </a:solidFill>
-              </a:rPr>
-              <a:t>Ask: question with highlights and confidence, then an off-topic one</a:t>
-            </a:r>
-            <a:endParaRPr lang="en-US" sz="1600" dirty="0"/>
-          </a:p>
-        </p:txBody>
-      </p:sp>
-      <p:sp>
-        <p:nvSpPr>
-          <p:cNvPr id="21" name="Demo screenshot frame"/>
-          <p:cNvSpPr/>
-          <p:nvPr/>
-        </p:nvSpPr>
-        <p:spPr>
-          <a:xfrm>
-            <a:off x="6528816" y="1545336"/>
-            <a:ext cx="5138928" cy="3252978"/>
+            <a:off x="548640" y="1463040"/>
+            <a:ext cx="2567864" cy="2377440"/>
           </a:xfrm>
           <a:prstGeom prst="roundRect">
             <a:avLst>
-              <a:gd name="adj" fmla="val 2249"/>
+              <a:gd name="adj" fmla="val 4615"/>
             </a:avLst>
           </a:prstGeom>
           <a:solidFill>
-            <a:schemeClr val="bg1"/>
+            <a:schemeClr val="tx2"/>
           </a:solidFill>
-          <a:ln w="12700">
-            <a:solidFill>
-              <a:schemeClr val="bg2"/>
-            </a:solidFill>
-            <a:prstDash val="solid"/>
-          </a:ln>
+          <a:ln/>
           <a:effectLst>
             <a:outerShdw sx="100000" sy="100000" kx="0" ky="0" algn="bl" rotWithShape="0" blurRad="101600" dist="25400" dir="5400000">
               <a:srgbClr val="000000">
@@ -8240,9 +9728,470 @@
           </a:effectLst>
         </p:spPr>
       </p:sp>
+      <p:sp>
+        <p:nvSpPr>
+          <p:cNvPr id="4" name="Result 1 value"/>
+          <p:cNvSpPr txBox="1"/>
+          <p:nvPr/>
+        </p:nvSpPr>
+        <p:spPr>
+          <a:xfrm>
+            <a:off x="777240" y="1645920"/>
+            <a:ext cx="2110664" cy="1097280"/>
+          </a:xfrm>
+          <a:prstGeom prst="rect">
+            <a:avLst/>
+          </a:prstGeom>
+          <a:noFill/>
+          <a:ln/>
+        </p:spPr>
+        <p:txBody>
+          <a:bodyPr wrap="square" lIns="0" tIns="0" rIns="0" bIns="0" rtlCol="0" anchor="ctr">
+            <a:normAutofit/>
+          </a:bodyPr>
+          <a:lstStyle/>
+          <a:p>
+            <a:pPr algn="ctr" indent="0" marL="0">
+              <a:buNone/>
+            </a:pPr>
+            <a:r>
+              <a:rPr lang="en-US" sz="4000" b="1" dirty="0">
+                <a:solidFill>
+                  <a:schemeClr val="accent6"/>
+                </a:solidFill>
+              </a:rPr>
+              <a:t>0.526</a:t>
+            </a:r>
+            <a:endParaRPr lang="en-US" sz="4000" dirty="0"/>
+          </a:p>
+        </p:txBody>
+      </p:sp>
+      <p:sp>
+        <p:nvSpPr>
+          <p:cNvPr id="5" name="Result 1 label"/>
+          <p:cNvSpPr txBox="1"/>
+          <p:nvPr/>
+        </p:nvSpPr>
+        <p:spPr>
+          <a:xfrm>
+            <a:off x="777240" y="2743200"/>
+            <a:ext cx="2110664" cy="914400"/>
+          </a:xfrm>
+          <a:prstGeom prst="rect">
+            <a:avLst/>
+          </a:prstGeom>
+          <a:noFill/>
+          <a:ln/>
+        </p:spPr>
+        <p:txBody>
+          <a:bodyPr wrap="square" lIns="0" tIns="0" rIns="0" bIns="0" rtlCol="0" anchor="t"/>
+          <a:lstStyle/>
+          <a:p>
+            <a:pPr algn="ctr" indent="0" marL="0">
+              <a:buNone/>
+            </a:pPr>
+            <a:r>
+              <a:rPr lang="en-US" sz="1400" dirty="0">
+                <a:solidFill>
+                  <a:schemeClr val="bg1"/>
+                </a:solidFill>
+              </a:rPr>
+              <a:t>ROUGE-1 F1 vs reference (Lead-6: 0.465)</a:t>
+            </a:r>
+            <a:endParaRPr lang="en-US" sz="1400" dirty="0"/>
+          </a:p>
+        </p:txBody>
+      </p:sp>
+      <p:sp>
+        <p:nvSpPr>
+          <p:cNvPr id="6" name="Result 2 card"/>
+          <p:cNvSpPr/>
+          <p:nvPr/>
+        </p:nvSpPr>
+        <p:spPr>
+          <a:xfrm>
+            <a:off x="3390824" y="1463040"/>
+            <a:ext cx="2567864" cy="2377440"/>
+          </a:xfrm>
+          <a:prstGeom prst="roundRect">
+            <a:avLst>
+              <a:gd name="adj" fmla="val 4615"/>
+            </a:avLst>
+          </a:prstGeom>
+          <a:solidFill>
+            <a:schemeClr val="tx2"/>
+          </a:solidFill>
+          <a:ln/>
+          <a:effectLst>
+            <a:outerShdw sx="100000" sy="100000" kx="0" ky="0" algn="bl" rotWithShape="0" blurRad="101600" dist="25400" dir="5400000">
+              <a:srgbClr val="000000">
+                <a:alpha val="14000"/>
+              </a:srgbClr>
+            </a:outerShdw>
+          </a:effectLst>
+        </p:spPr>
+      </p:sp>
+      <p:sp>
+        <p:nvSpPr>
+          <p:cNvPr id="7" name="Result 2 value"/>
+          <p:cNvSpPr txBox="1"/>
+          <p:nvPr/>
+        </p:nvSpPr>
+        <p:spPr>
+          <a:xfrm>
+            <a:off x="3619424" y="1645920"/>
+            <a:ext cx="2110664" cy="1097280"/>
+          </a:xfrm>
+          <a:prstGeom prst="rect">
+            <a:avLst/>
+          </a:prstGeom>
+          <a:noFill/>
+          <a:ln/>
+        </p:spPr>
+        <p:txBody>
+          <a:bodyPr wrap="square" lIns="0" tIns="0" rIns="0" bIns="0" rtlCol="0" anchor="ctr">
+            <a:normAutofit/>
+          </a:bodyPr>
+          <a:lstStyle/>
+          <a:p>
+            <a:pPr algn="ctr" indent="0" marL="0">
+              <a:buNone/>
+            </a:pPr>
+            <a:r>
+              <a:rPr lang="en-US" sz="4000" b="1" dirty="0">
+                <a:solidFill>
+                  <a:schemeClr val="accent6"/>
+                </a:solidFill>
+              </a:rPr>
+              <a:t>100%</a:t>
+            </a:r>
+            <a:endParaRPr lang="en-US" sz="4000" dirty="0"/>
+          </a:p>
+        </p:txBody>
+      </p:sp>
+      <p:sp>
+        <p:nvSpPr>
+          <p:cNvPr id="8" name="Result 2 label"/>
+          <p:cNvSpPr txBox="1"/>
+          <p:nvPr/>
+        </p:nvSpPr>
+        <p:spPr>
+          <a:xfrm>
+            <a:off x="3619424" y="2743200"/>
+            <a:ext cx="2110664" cy="914400"/>
+          </a:xfrm>
+          <a:prstGeom prst="rect">
+            <a:avLst/>
+          </a:prstGeom>
+          <a:noFill/>
+          <a:ln/>
+        </p:spPr>
+        <p:txBody>
+          <a:bodyPr wrap="square" lIns="0" tIns="0" rIns="0" bIns="0" rtlCol="0" anchor="t"/>
+          <a:lstStyle/>
+          <a:p>
+            <a:pPr algn="ctr" indent="0" marL="0">
+              <a:buNone/>
+            </a:pPr>
+            <a:r>
+              <a:rPr lang="en-US" sz="1400" dirty="0">
+                <a:solidFill>
+                  <a:schemeClr val="bg1"/>
+                </a:solidFill>
+              </a:rPr>
+              <a:t>QA top-3 hit rate on 31 questions (top-1 80.6%)</a:t>
+            </a:r>
+            <a:endParaRPr lang="en-US" sz="1400" dirty="0"/>
+          </a:p>
+        </p:txBody>
+      </p:sp>
+      <p:sp>
+        <p:nvSpPr>
+          <p:cNvPr id="9" name="Result 3 card"/>
+          <p:cNvSpPr/>
+          <p:nvPr/>
+        </p:nvSpPr>
+        <p:spPr>
+          <a:xfrm>
+            <a:off x="6233008" y="1463040"/>
+            <a:ext cx="2567864" cy="2377440"/>
+          </a:xfrm>
+          <a:prstGeom prst="roundRect">
+            <a:avLst>
+              <a:gd name="adj" fmla="val 4615"/>
+            </a:avLst>
+          </a:prstGeom>
+          <a:solidFill>
+            <a:schemeClr val="tx2"/>
+          </a:solidFill>
+          <a:ln/>
+          <a:effectLst>
+            <a:outerShdw sx="100000" sy="100000" kx="0" ky="0" algn="bl" rotWithShape="0" blurRad="101600" dist="25400" dir="5400000">
+              <a:srgbClr val="000000">
+                <a:alpha val="14000"/>
+              </a:srgbClr>
+            </a:outerShdw>
+          </a:effectLst>
+        </p:spPr>
+      </p:sp>
+      <p:sp>
+        <p:nvSpPr>
+          <p:cNvPr id="10" name="Result 3 value"/>
+          <p:cNvSpPr txBox="1"/>
+          <p:nvPr/>
+        </p:nvSpPr>
+        <p:spPr>
+          <a:xfrm>
+            <a:off x="6461608" y="1645920"/>
+            <a:ext cx="2110664" cy="1097280"/>
+          </a:xfrm>
+          <a:prstGeom prst="rect">
+            <a:avLst/>
+          </a:prstGeom>
+          <a:noFill/>
+          <a:ln/>
+        </p:spPr>
+        <p:txBody>
+          <a:bodyPr wrap="square" lIns="0" tIns="0" rIns="0" bIns="0" rtlCol="0" anchor="ctr">
+            <a:normAutofit/>
+          </a:bodyPr>
+          <a:lstStyle/>
+          <a:p>
+            <a:pPr algn="ctr" indent="0" marL="0">
+              <a:buNone/>
+            </a:pPr>
+            <a:r>
+              <a:rPr lang="en-US" sz="4000" b="1" dirty="0">
+                <a:solidFill>
+                  <a:schemeClr val="accent6"/>
+                </a:solidFill>
+              </a:rPr>
+              <a:t>~6 ms</a:t>
+            </a:r>
+            <a:endParaRPr lang="en-US" sz="4000" dirty="0"/>
+          </a:p>
+        </p:txBody>
+      </p:sp>
+      <p:sp>
+        <p:nvSpPr>
+          <p:cNvPr id="11" name="Result 3 label"/>
+          <p:cNvSpPr txBox="1"/>
+          <p:nvPr/>
+        </p:nvSpPr>
+        <p:spPr>
+          <a:xfrm>
+            <a:off x="6461608" y="2743200"/>
+            <a:ext cx="2110664" cy="914400"/>
+          </a:xfrm>
+          <a:prstGeom prst="rect">
+            <a:avLst/>
+          </a:prstGeom>
+          <a:noFill/>
+          <a:ln/>
+        </p:spPr>
+        <p:txBody>
+          <a:bodyPr wrap="square" lIns="0" tIns="0" rIns="0" bIns="0" rtlCol="0" anchor="t"/>
+          <a:lstStyle/>
+          <a:p>
+            <a:pPr algn="ctr" indent="0" marL="0">
+              <a:buNone/>
+            </a:pPr>
+            <a:r>
+              <a:rPr lang="en-US" sz="1400" dirty="0">
+                <a:solidFill>
+                  <a:schemeClr val="bg1"/>
+                </a:solidFill>
+              </a:rPr>
+              <a:t>full analysis of a 780-word note set</a:t>
+            </a:r>
+            <a:endParaRPr lang="en-US" sz="1400" dirty="0"/>
+          </a:p>
+        </p:txBody>
+      </p:sp>
+      <p:sp>
+        <p:nvSpPr>
+          <p:cNvPr id="12" name="Result 4 card"/>
+          <p:cNvSpPr/>
+          <p:nvPr/>
+        </p:nvSpPr>
+        <p:spPr>
+          <a:xfrm>
+            <a:off x="9075191" y="1463040"/>
+            <a:ext cx="2567864" cy="2377440"/>
+          </a:xfrm>
+          <a:prstGeom prst="roundRect">
+            <a:avLst>
+              <a:gd name="adj" fmla="val 4615"/>
+            </a:avLst>
+          </a:prstGeom>
+          <a:solidFill>
+            <a:schemeClr val="tx2"/>
+          </a:solidFill>
+          <a:ln/>
+          <a:effectLst>
+            <a:outerShdw sx="100000" sy="100000" kx="0" ky="0" algn="bl" rotWithShape="0" blurRad="101600" dist="25400" dir="5400000">
+              <a:srgbClr val="000000">
+                <a:alpha val="14000"/>
+              </a:srgbClr>
+            </a:outerShdw>
+          </a:effectLst>
+        </p:spPr>
+      </p:sp>
+      <p:sp>
+        <p:nvSpPr>
+          <p:cNvPr id="13" name="Result 4 value"/>
+          <p:cNvSpPr txBox="1"/>
+          <p:nvPr/>
+        </p:nvSpPr>
+        <p:spPr>
+          <a:xfrm>
+            <a:off x="9303791" y="1645920"/>
+            <a:ext cx="2110664" cy="1097280"/>
+          </a:xfrm>
+          <a:prstGeom prst="rect">
+            <a:avLst/>
+          </a:prstGeom>
+          <a:noFill/>
+          <a:ln/>
+        </p:spPr>
+        <p:txBody>
+          <a:bodyPr wrap="square" lIns="0" tIns="0" rIns="0" bIns="0" rtlCol="0" anchor="ctr">
+            <a:normAutofit/>
+          </a:bodyPr>
+          <a:lstStyle/>
+          <a:p>
+            <a:pPr algn="ctr" indent="0" marL="0">
+              <a:buNone/>
+            </a:pPr>
+            <a:r>
+              <a:rPr lang="en-US" sz="4000" b="1" dirty="0">
+                <a:solidFill>
+                  <a:schemeClr val="accent6"/>
+                </a:solidFill>
+              </a:rPr>
+              <a:t>~1 ms</a:t>
+            </a:r>
+            <a:endParaRPr lang="en-US" sz="4000" dirty="0"/>
+          </a:p>
+        </p:txBody>
+      </p:sp>
+      <p:sp>
+        <p:nvSpPr>
+          <p:cNvPr id="14" name="Result 4 label"/>
+          <p:cNvSpPr txBox="1"/>
+          <p:nvPr/>
+        </p:nvSpPr>
+        <p:spPr>
+          <a:xfrm>
+            <a:off x="9303791" y="2743200"/>
+            <a:ext cx="2110664" cy="914400"/>
+          </a:xfrm>
+          <a:prstGeom prst="rect">
+            <a:avLst/>
+          </a:prstGeom>
+          <a:noFill/>
+          <a:ln/>
+        </p:spPr>
+        <p:txBody>
+          <a:bodyPr wrap="square" lIns="0" tIns="0" rIns="0" bIns="0" rtlCol="0" anchor="t"/>
+          <a:lstStyle/>
+          <a:p>
+            <a:pPr algn="ctr" indent="0" marL="0">
+              <a:buNone/>
+            </a:pPr>
+            <a:r>
+              <a:rPr lang="en-US" sz="1400" dirty="0">
+                <a:solidFill>
+                  <a:schemeClr val="bg1"/>
+                </a:solidFill>
+              </a:rPr>
+              <a:t>Ask-your-notes HTTP round trip</a:t>
+            </a:r>
+            <a:endParaRPr lang="en-US" sz="1400" dirty="0"/>
+          </a:p>
+        </p:txBody>
+      </p:sp>
+      <p:sp>
+        <p:nvSpPr>
+          <p:cNvPr id="15" name="Results caveat"/>
+          <p:cNvSpPr txBox="1"/>
+          <p:nvPr/>
+        </p:nvSpPr>
+        <p:spPr>
+          <a:xfrm>
+            <a:off x="548640" y="4160520"/>
+            <a:ext cx="11094415" cy="457200"/>
+          </a:xfrm>
+          <a:prstGeom prst="rect">
+            <a:avLst/>
+          </a:prstGeom>
+          <a:noFill/>
+          <a:ln/>
+        </p:spPr>
+        <p:txBody>
+          <a:bodyPr wrap="square" lIns="0" tIns="0" rIns="0" bIns="0" rtlCol="0" anchor="ctr"/>
+          <a:lstStyle/>
+          <a:p>
+            <a:pPr indent="0" marL="0">
+              <a:buNone/>
+            </a:pPr>
+            <a:r>
+              <a:rPr lang="en-US" sz="1200" i="1" dirty="0">
+                <a:solidFill>
+                  <a:schemeClr val="accent4"/>
+                </a:solidFill>
+              </a:rPr>
+              <a:t>Measured on held-out data generated by the project (see REPORT.md for method). Real-world performance needs field validation.</a:t>
+            </a:r>
+            <a:endParaRPr lang="en-US" sz="1200" dirty="0"/>
+          </a:p>
+        </p:txBody>
+      </p:sp>
+      <p:sp>
+        <p:nvSpPr>
+          <p:cNvPr id="16" name="Impact strip"/>
+          <p:cNvSpPr/>
+          <p:nvPr/>
+        </p:nvSpPr>
+        <p:spPr>
+          <a:xfrm>
+            <a:off x="548640" y="4754880"/>
+            <a:ext cx="11094415" cy="1371600"/>
+          </a:xfrm>
+          <a:prstGeom prst="roundRect">
+            <a:avLst>
+              <a:gd name="adj" fmla="val 8000"/>
+            </a:avLst>
+          </a:prstGeom>
+          <a:solidFill>
+            <a:schemeClr val="accent2"/>
+          </a:solidFill>
+          <a:ln/>
+        </p:spPr>
+      </p:sp>
+      <p:sp>
+        <p:nvSpPr>
+          <p:cNvPr id="17" name="Impact circle"/>
+          <p:cNvSpPr/>
+          <p:nvPr/>
+        </p:nvSpPr>
+        <p:spPr>
+          <a:xfrm>
+            <a:off x="822960" y="5120640"/>
+            <a:ext cx="640080" cy="640080"/>
+          </a:xfrm>
+          <a:prstGeom prst="ellipse">
+            <a:avLst/>
+          </a:prstGeom>
+          <a:solidFill>
+            <a:schemeClr val="accent1"/>
+          </a:solidFill>
+          <a:ln/>
+        </p:spPr>
+      </p:sp>
       <p:pic>
         <p:nvPicPr>
-          <p:cNvPr id="22" name="Demo screenshot" descr="StudyPilot screenshot">    </p:cNvPr>
+          <p:cNvPr id="18" name="Impact icon" descr="preencoded.png">    </p:cNvPr>
           <p:cNvPicPr>
             <a:picLocks noChangeAspect="1"/>
           </p:cNvPicPr>
@@ -8256,8 +10205,8 @@
         </p:blipFill>
         <p:spPr>
           <a:xfrm>
-            <a:off x="6583680" y="1600200"/>
-            <a:ext cx="5029200" cy="3143250"/>
+            <a:off x="982980" y="5280660"/>
+            <a:ext cx="320040" cy="320040"/>
           </a:xfrm>
           <a:prstGeom prst="rect">
             <a:avLst/>
@@ -8266,14 +10215,14 @@
       </p:pic>
       <p:sp>
         <p:nvSpPr>
-          <p:cNvPr id="23" name="Run command"/>
+          <p:cNvPr id="19" name="Impact text"/>
           <p:cNvSpPr txBox="1"/>
           <p:nvPr/>
         </p:nvSpPr>
         <p:spPr>
           <a:xfrm>
-            <a:off x="6583680" y="5029200"/>
-            <a:ext cx="5029200" cy="457200"/>
+            <a:off x="1737360" y="4754880"/>
+            <a:ext cx="9631375" cy="1371600"/>
           </a:xfrm>
           <a:prstGeom prst="rect">
             <a:avLst/>
@@ -8285,21 +10234,29 @@
           <a:bodyPr wrap="square" lIns="0" tIns="0" rIns="0" bIns="0" rtlCol="0" anchor="ctr"/>
           <a:lstStyle/>
           <a:p>
-            <a:pPr algn="ctr" indent="0" marL="0">
-              <a:buNone/>
-            </a:pPr>
-            <a:r>
-              <a:rPr lang="en-US" sz="1400" dirty="0">
+            <a:pPr indent="0" marL="0">
+              <a:buNone/>
+            </a:pPr>
+            <a:r>
+              <a:rPr lang="en-US" sz="1500" b="1" dirty="0">
                 <a:solidFill>
                   <a:schemeClr val="accent3"/>
                 </a:solidFill>
-                <a:latin typeface="Courier New" pitchFamily="34" charset="0"/>
-                <a:ea typeface="Courier New" pitchFamily="34" charset="-122"/>
-                <a:cs typeface="Courier New" pitchFamily="34" charset="-120"/>
-              </a:rPr>
-              <a:t>python app.py  →  http://localhost:8001</a:t>
-            </a:r>
-            <a:endParaRPr lang="en-US" sz="1400" dirty="0"/>
+              </a:rPr>
+              <a:t>Impact  </a:t>
+            </a:r>
+            <a:pPr indent="0" marL="0">
+              <a:buNone/>
+            </a:pPr>
+            <a:r>
+              <a:rPr lang="en-US" sz="1500" dirty="0">
+                <a:solidFill>
+                  <a:schemeClr val="tx1"/>
+                </a:solidFill>
+              </a:rPr>
+              <a:t>AI study help for students with poor connectivity  ·  No subscription, no API cost, no mobile data  ·  Notes and progress never leave the device</a:t>
+            </a:r>
+            <a:endParaRPr lang="en-US" sz="1500" dirty="0"/>
           </a:p>
         </p:txBody>
       </p:sp>
